--- a/slide/slide-1-iam.pptx
+++ b/slide/slide-1-iam.pptx
@@ -5988,12 +5988,12 @@
         </p:nvSpPr>
         <p:spPr>
           <a:xfrm>
-            <a:off x="548640" y="1463040"/>
-            <a:ext cx="5669280" cy="3566160"/>
+            <a:off x="548640" y="1325880"/>
+            <a:ext cx="7589520" cy="2514600"/>
           </a:xfrm>
           <a:prstGeom prst="roundRect">
             <a:avLst>
-              <a:gd name="adj" fmla="val 2051"/>
+              <a:gd name="adj" fmla="val 2909"/>
             </a:avLst>
           </a:prstGeom>
           <a:solidFill>
@@ -6015,8 +6015,8 @@
         </p:nvSpPr>
         <p:spPr>
           <a:xfrm>
-            <a:off x="731520" y="1600200"/>
-            <a:ext cx="5303520" cy="3291840"/>
+            <a:off x="731520" y="1463040"/>
+            <a:ext cx="7223760" cy="2240280"/>
           </a:xfrm>
           <a:prstGeom prst="rect">
             <a:avLst/>
@@ -6032,7 +6032,7 @@
               <a:buNone/>
             </a:pPr>
             <a:r>
-              <a:rPr lang="en-US" sz="1200" dirty="0">
+              <a:rPr lang="en-US" sz="1600" dirty="0">
                 <a:solidFill>
                   <a:srgbClr val="E6E6F0"/>
                 </a:solidFill>
@@ -6042,14 +6042,14 @@
               </a:rPr>
               <a:t>data "aws_iam_policy_document" "trust" {</a:t>
             </a:r>
-            <a:endParaRPr lang="en-US" sz="1200" dirty="0"/>
+            <a:endParaRPr lang="en-US" sz="1600" dirty="0"/>
           </a:p>
           <a:p>
             <a:pPr indent="0" marL="0">
               <a:buNone/>
             </a:pPr>
             <a:r>
-              <a:rPr lang="en-US" sz="1200" dirty="0">
+              <a:rPr lang="en-US" sz="1600" dirty="0">
                 <a:solidFill>
                   <a:srgbClr val="E6E6F0"/>
                 </a:solidFill>
@@ -6059,14 +6059,14 @@
               </a:rPr>
               <a:t>  statement {</a:t>
             </a:r>
-            <a:endParaRPr lang="en-US" sz="1200" dirty="0"/>
+            <a:endParaRPr lang="en-US" sz="1600" dirty="0"/>
           </a:p>
           <a:p>
             <a:pPr indent="0" marL="0">
               <a:buNone/>
             </a:pPr>
             <a:r>
-              <a:rPr lang="en-US" sz="1200" dirty="0">
+              <a:rPr lang="en-US" sz="1600" dirty="0">
                 <a:solidFill>
                   <a:srgbClr val="E6E6F0"/>
                 </a:solidFill>
@@ -6076,14 +6076,14 @@
               </a:rPr>
               <a:t>    actions = ["sts:AssumeRole"]</a:t>
             </a:r>
-            <a:endParaRPr lang="en-US" sz="1200" dirty="0"/>
+            <a:endParaRPr lang="en-US" sz="1600" dirty="0"/>
           </a:p>
           <a:p>
             <a:pPr indent="0" marL="0">
               <a:buNone/>
             </a:pPr>
             <a:r>
-              <a:rPr lang="en-US" sz="1200" dirty="0">
+              <a:rPr lang="en-US" sz="1600" dirty="0">
                 <a:solidFill>
                   <a:srgbClr val="E6E6F0"/>
                 </a:solidFill>
@@ -6093,14 +6093,14 @@
               </a:rPr>
               <a:t>    principals {</a:t>
             </a:r>
-            <a:endParaRPr lang="en-US" sz="1200" dirty="0"/>
+            <a:endParaRPr lang="en-US" sz="1600" dirty="0"/>
           </a:p>
           <a:p>
             <a:pPr indent="0" marL="0">
               <a:buNone/>
             </a:pPr>
             <a:r>
-              <a:rPr lang="en-US" sz="1200" dirty="0">
+              <a:rPr lang="en-US" sz="1600" dirty="0">
                 <a:solidFill>
                   <a:srgbClr val="E6E6F0"/>
                 </a:solidFill>
@@ -6110,14 +6110,14 @@
               </a:rPr>
               <a:t>      type        = "AWS"</a:t>
             </a:r>
-            <a:endParaRPr lang="en-US" sz="1200" dirty="0"/>
+            <a:endParaRPr lang="en-US" sz="1600" dirty="0"/>
           </a:p>
           <a:p>
             <a:pPr indent="0" marL="0">
               <a:buNone/>
             </a:pPr>
             <a:r>
-              <a:rPr lang="en-US" sz="1200" dirty="0">
+              <a:rPr lang="en-US" sz="1600" dirty="0">
                 <a:solidFill>
                   <a:srgbClr val="E6E6F0"/>
                 </a:solidFill>
@@ -6127,14 +6127,14 @@
               </a:rPr>
               <a:t>      identifiers = ["arn:aws:iam::123456789012:root"]</a:t>
             </a:r>
-            <a:endParaRPr lang="en-US" sz="1200" dirty="0"/>
+            <a:endParaRPr lang="en-US" sz="1600" dirty="0"/>
           </a:p>
           <a:p>
             <a:pPr indent="0" marL="0">
               <a:buNone/>
             </a:pPr>
             <a:r>
-              <a:rPr lang="en-US" sz="1200" dirty="0">
+              <a:rPr lang="en-US" sz="1600" dirty="0">
                 <a:solidFill>
                   <a:srgbClr val="E6E6F0"/>
                 </a:solidFill>
@@ -6144,14 +6144,14 @@
               </a:rPr>
               <a:t>    }</a:t>
             </a:r>
-            <a:endParaRPr lang="en-US" sz="1200" dirty="0"/>
+            <a:endParaRPr lang="en-US" sz="1600" dirty="0"/>
           </a:p>
           <a:p>
             <a:pPr indent="0" marL="0">
               <a:buNone/>
             </a:pPr>
             <a:r>
-              <a:rPr lang="en-US" sz="1200" dirty="0">
+              <a:rPr lang="en-US" sz="1600" dirty="0">
                 <a:solidFill>
                   <a:srgbClr val="E6E6F0"/>
                 </a:solidFill>
@@ -6161,14 +6161,14 @@
               </a:rPr>
               <a:t>  }</a:t>
             </a:r>
-            <a:endParaRPr lang="en-US" sz="1200" dirty="0"/>
+            <a:endParaRPr lang="en-US" sz="1600" dirty="0"/>
           </a:p>
           <a:p>
             <a:pPr indent="0" marL="0">
               <a:buNone/>
             </a:pPr>
             <a:r>
-              <a:rPr lang="en-US" sz="1200" dirty="0">
+              <a:rPr lang="en-US" sz="1600" dirty="0">
                 <a:solidFill>
                   <a:srgbClr val="E6E6F0"/>
                 </a:solidFill>
@@ -6178,20 +6178,59 @@
               </a:rPr>
               <a:t>}</a:t>
             </a:r>
-            <a:endParaRPr lang="en-US" sz="1200" dirty="0"/>
-          </a:p>
-        </p:txBody>
-      </p:sp>
-      <p:sp>
-        <p:nvSpPr>
-          <p:cNvPr id="7" name="Shape 4"/>
+            <a:endParaRPr lang="en-US" sz="1600" dirty="0"/>
+          </a:p>
+        </p:txBody>
+      </p:sp>
+      <p:sp>
+        <p:nvSpPr>
+          <p:cNvPr id="7" name="Text 4"/>
+          <p:cNvSpPr txBox="1"/>
+          <p:nvPr/>
+        </p:nvSpPr>
+        <p:spPr>
+          <a:xfrm>
+            <a:off x="8321040" y="1325880"/>
+            <a:ext cx="3319272" cy="2514600"/>
+          </a:xfrm>
+          <a:prstGeom prst="rect">
+            <a:avLst/>
+          </a:prstGeom>
+          <a:noFill/>
+          <a:ln/>
+        </p:spPr>
+        <p:txBody>
+          <a:bodyPr wrap="square" lIns="0" tIns="0" rIns="0" bIns="0" rtlCol="0" anchor="ctr"/>
+          <a:lstStyle/>
+          <a:p>
+            <a:pPr algn="l" indent="0" marL="0">
+              <a:buNone/>
+            </a:pPr>
+            <a:r>
+              <a:rPr lang="en-US" sz="1700" b="1" dirty="0">
+                <a:solidFill>
+                  <a:srgbClr val="22253A"/>
+                </a:solidFill>
+                <a:latin typeface="Calibri" pitchFamily="34" charset="0"/>
+                <a:ea typeface="Calibri" pitchFamily="34" charset="-122"/>
+                <a:cs typeface="Calibri" pitchFamily="34" charset="-120"/>
+              </a:rPr>
+              <a:t>HCL: quello che scrivi in Terraform</a:t>
+            </a:r>
+            <a:endParaRPr lang="en-US" sz="1700" dirty="0"/>
+          </a:p>
+        </p:txBody>
+      </p:sp>
+      <p:sp>
+        <p:nvSpPr>
+          <p:cNvPr id="8" name="Shape 5"/>
           <p:cNvSpPr/>
           <p:nvPr/>
         </p:nvSpPr>
         <p:spPr>
           <a:xfrm>
-            <a:off x="6263640" y="3246120"/>
-            <a:ext cx="320040" cy="0"/>
+            <a:off x="4206240" y="3858768"/>
+            <a:ext cx="0" cy="274320"/>
           </a:xfrm>
           <a:prstGeom prst="line">
             <a:avLst/>
@@ -6208,18 +6247,18 @@
       </p:sp>
       <p:sp>
         <p:nvSpPr>
-          <p:cNvPr id="8" name="Shape 5"/>
+          <p:cNvPr id="9" name="Shape 6"/>
           <p:cNvSpPr/>
           <p:nvPr/>
         </p:nvSpPr>
         <p:spPr>
           <a:xfrm>
-            <a:off x="6629400" y="1463040"/>
-            <a:ext cx="5010912" cy="3566160"/>
+            <a:off x="548640" y="4160520"/>
+            <a:ext cx="7589520" cy="2148840"/>
           </a:xfrm>
           <a:prstGeom prst="roundRect">
             <a:avLst>
-              <a:gd name="adj" fmla="val 2051"/>
+              <a:gd name="adj" fmla="val 3404"/>
             </a:avLst>
           </a:prstGeom>
           <a:solidFill>
@@ -6235,14 +6274,14 @@
       </p:sp>
       <p:sp>
         <p:nvSpPr>
-          <p:cNvPr id="9" name="Text 6"/>
+          <p:cNvPr id="10" name="Text 7"/>
           <p:cNvSpPr txBox="1"/>
           <p:nvPr/>
         </p:nvSpPr>
         <p:spPr>
           <a:xfrm>
-            <a:off x="6812280" y="1600200"/>
-            <a:ext cx="4645152" cy="3291840"/>
+            <a:off x="731520" y="4297680"/>
+            <a:ext cx="7223760" cy="1874520"/>
           </a:xfrm>
           <a:prstGeom prst="rect">
             <a:avLst/>
@@ -6258,7 +6297,7 @@
               <a:buNone/>
             </a:pPr>
             <a:r>
-              <a:rPr lang="en-US" sz="1200" dirty="0">
+              <a:rPr lang="en-US" sz="1600" dirty="0">
                 <a:solidFill>
                   <a:srgbClr val="E6E6F0"/>
                 </a:solidFill>
@@ -6268,14 +6307,14 @@
               </a:rPr>
               <a:t>{</a:t>
             </a:r>
-            <a:endParaRPr lang="en-US" sz="1200" dirty="0"/>
+            <a:endParaRPr lang="en-US" sz="1600" dirty="0"/>
           </a:p>
           <a:p>
             <a:pPr indent="0" marL="0">
               <a:buNone/>
             </a:pPr>
             <a:r>
-              <a:rPr lang="en-US" sz="1200" dirty="0">
+              <a:rPr lang="en-US" sz="1600" dirty="0">
                 <a:solidFill>
                   <a:srgbClr val="E6E6F0"/>
                 </a:solidFill>
@@ -6283,16 +6322,16 @@
                 <a:ea typeface="Courier New" pitchFamily="34" charset="-122"/>
                 <a:cs typeface="Courier New" pitchFamily="34" charset="-120"/>
               </a:rPr>
-              <a:t>  "Version": "2012-10-17",</a:t>
-            </a:r>
-            <a:endParaRPr lang="en-US" sz="1200" dirty="0"/>
+              <a:t>  "Effect": "Allow",</a:t>
+            </a:r>
+            <a:endParaRPr lang="en-US" sz="1600" dirty="0"/>
           </a:p>
           <a:p>
             <a:pPr indent="0" marL="0">
               <a:buNone/>
             </a:pPr>
             <a:r>
-              <a:rPr lang="en-US" sz="1200" dirty="0">
+              <a:rPr lang="en-US" sz="1600" dirty="0">
                 <a:solidFill>
                   <a:srgbClr val="E6E6F0"/>
                 </a:solidFill>
@@ -6300,16 +6339,16 @@
                 <a:ea typeface="Courier New" pitchFamily="34" charset="-122"/>
                 <a:cs typeface="Courier New" pitchFamily="34" charset="-120"/>
               </a:rPr>
-              <a:t>  "Statement": [{</a:t>
-            </a:r>
-            <a:endParaRPr lang="en-US" sz="1200" dirty="0"/>
+              <a:t>  "Action": "sts:AssumeRole",</a:t>
+            </a:r>
+            <a:endParaRPr lang="en-US" sz="1600" dirty="0"/>
           </a:p>
           <a:p>
             <a:pPr indent="0" marL="0">
               <a:buNone/>
             </a:pPr>
             <a:r>
-              <a:rPr lang="en-US" sz="1200" dirty="0">
+              <a:rPr lang="en-US" sz="1600" dirty="0">
                 <a:solidFill>
                   <a:srgbClr val="E6E6F0"/>
                 </a:solidFill>
@@ -6317,16 +6356,16 @@
                 <a:ea typeface="Courier New" pitchFamily="34" charset="-122"/>
                 <a:cs typeface="Courier New" pitchFamily="34" charset="-120"/>
               </a:rPr>
-              <a:t>    "Effect": "Allow",</a:t>
-            </a:r>
-            <a:endParaRPr lang="en-US" sz="1200" dirty="0"/>
+              <a:t>  "Principal": {</a:t>
+            </a:r>
+            <a:endParaRPr lang="en-US" sz="1600" dirty="0"/>
           </a:p>
           <a:p>
             <a:pPr indent="0" marL="0">
               <a:buNone/>
             </a:pPr>
             <a:r>
-              <a:rPr lang="en-US" sz="1200" dirty="0">
+              <a:rPr lang="en-US" sz="1600" dirty="0">
                 <a:solidFill>
                   <a:srgbClr val="E6E6F0"/>
                 </a:solidFill>
@@ -6334,16 +6373,16 @@
                 <a:ea typeface="Courier New" pitchFamily="34" charset="-122"/>
                 <a:cs typeface="Courier New" pitchFamily="34" charset="-120"/>
               </a:rPr>
-              <a:t>    "Action": "sts:AssumeRole",</a:t>
-            </a:r>
-            <a:endParaRPr lang="en-US" sz="1200" dirty="0"/>
+              <a:t>    "AWS": "arn:aws:iam::123456789012:root"</a:t>
+            </a:r>
+            <a:endParaRPr lang="en-US" sz="1600" dirty="0"/>
           </a:p>
           <a:p>
             <a:pPr indent="0" marL="0">
               <a:buNone/>
             </a:pPr>
             <a:r>
-              <a:rPr lang="en-US" sz="1200" dirty="0">
+              <a:rPr lang="en-US" sz="1600" dirty="0">
                 <a:solidFill>
                   <a:srgbClr val="E6E6F0"/>
                 </a:solidFill>
@@ -6351,16 +6390,16 @@
                 <a:ea typeface="Courier New" pitchFamily="34" charset="-122"/>
                 <a:cs typeface="Courier New" pitchFamily="34" charset="-120"/>
               </a:rPr>
-              <a:t>    "Principal": {</a:t>
-            </a:r>
-            <a:endParaRPr lang="en-US" sz="1200" dirty="0"/>
+              <a:t>  }</a:t>
+            </a:r>
+            <a:endParaRPr lang="en-US" sz="1600" dirty="0"/>
           </a:p>
           <a:p>
             <a:pPr indent="0" marL="0">
               <a:buNone/>
             </a:pPr>
             <a:r>
-              <a:rPr lang="en-US" sz="1200" dirty="0">
+              <a:rPr lang="en-US" sz="1600" dirty="0">
                 <a:solidFill>
                   <a:srgbClr val="E6E6F0"/>
                 </a:solidFill>
@@ -6368,77 +6407,26 @@
                 <a:ea typeface="Courier New" pitchFamily="34" charset="-122"/>
                 <a:cs typeface="Courier New" pitchFamily="34" charset="-120"/>
               </a:rPr>
-              <a:t>      "AWS": "arn:aws:iam::123456789012:root"</a:t>
-            </a:r>
-            <a:endParaRPr lang="en-US" sz="1200" dirty="0"/>
-          </a:p>
-          <a:p>
-            <a:pPr indent="0" marL="0">
-              <a:buNone/>
-            </a:pPr>
-            <a:r>
-              <a:rPr lang="en-US" sz="1200" dirty="0">
-                <a:solidFill>
-                  <a:srgbClr val="E6E6F0"/>
-                </a:solidFill>
-                <a:latin typeface="Courier New" pitchFamily="34" charset="0"/>
-                <a:ea typeface="Courier New" pitchFamily="34" charset="-122"/>
-                <a:cs typeface="Courier New" pitchFamily="34" charset="-120"/>
-              </a:rPr>
-              <a:t>    }</a:t>
-            </a:r>
-            <a:endParaRPr lang="en-US" sz="1200" dirty="0"/>
-          </a:p>
-          <a:p>
-            <a:pPr indent="0" marL="0">
-              <a:buNone/>
-            </a:pPr>
-            <a:r>
-              <a:rPr lang="en-US" sz="1200" dirty="0">
-                <a:solidFill>
-                  <a:srgbClr val="E6E6F0"/>
-                </a:solidFill>
-                <a:latin typeface="Courier New" pitchFamily="34" charset="0"/>
-                <a:ea typeface="Courier New" pitchFamily="34" charset="-122"/>
-                <a:cs typeface="Courier New" pitchFamily="34" charset="-120"/>
-              </a:rPr>
-              <a:t>  }]</a:t>
-            </a:r>
-            <a:endParaRPr lang="en-US" sz="1200" dirty="0"/>
-          </a:p>
-          <a:p>
-            <a:pPr indent="0" marL="0">
-              <a:buNone/>
-            </a:pPr>
-            <a:r>
-              <a:rPr lang="en-US" sz="1200" dirty="0">
-                <a:solidFill>
-                  <a:srgbClr val="E6E6F0"/>
-                </a:solidFill>
-                <a:latin typeface="Courier New" pitchFamily="34" charset="0"/>
-                <a:ea typeface="Courier New" pitchFamily="34" charset="-122"/>
-                <a:cs typeface="Courier New" pitchFamily="34" charset="-120"/>
-              </a:rPr>
               <a:t>}</a:t>
             </a:r>
-            <a:endParaRPr lang="en-US" sz="1200" dirty="0"/>
-          </a:p>
-        </p:txBody>
-      </p:sp>
-      <p:sp>
-        <p:nvSpPr>
-          <p:cNvPr id="10" name="Shape 7"/>
+            <a:endParaRPr lang="en-US" sz="1600" dirty="0"/>
+          </a:p>
+        </p:txBody>
+      </p:sp>
+      <p:sp>
+        <p:nvSpPr>
+          <p:cNvPr id="11" name="Shape 8"/>
           <p:cNvSpPr/>
           <p:nvPr/>
         </p:nvSpPr>
         <p:spPr>
           <a:xfrm>
-            <a:off x="548640" y="5303520"/>
-            <a:ext cx="11094415" cy="731520"/>
+            <a:off x="8321040" y="4160520"/>
+            <a:ext cx="3319272" cy="2148840"/>
           </a:xfrm>
           <a:prstGeom prst="roundRect">
             <a:avLst>
-              <a:gd name="adj" fmla="val 12500"/>
+              <a:gd name="adj" fmla="val 4255"/>
             </a:avLst>
           </a:prstGeom>
           <a:solidFill>
@@ -6454,14 +6442,14 @@
       </p:sp>
       <p:sp>
         <p:nvSpPr>
-          <p:cNvPr id="11" name="Text 8"/>
+          <p:cNvPr id="12" name="Text 9"/>
           <p:cNvSpPr txBox="1"/>
           <p:nvPr/>
         </p:nvSpPr>
         <p:spPr>
           <a:xfrm>
-            <a:off x="822960" y="5303520"/>
-            <a:ext cx="10545775" cy="731520"/>
+            <a:off x="8503920" y="4160520"/>
+            <a:ext cx="3017520" cy="2148840"/>
           </a:xfrm>
           <a:prstGeom prst="rect">
             <a:avLst/>
@@ -6473,21 +6461,87 @@
           <a:bodyPr wrap="square" lIns="0" tIns="0" rIns="0" bIns="0" rtlCol="0" anchor="ctr"/>
           <a:lstStyle/>
           <a:p>
-            <a:pPr algn="l" indent="0" marL="0">
-              <a:buNone/>
-            </a:pPr>
-            <a:r>
-              <a:rPr lang="en-US" sz="1600" b="1" dirty="0">
-                <a:solidFill>
-                  <a:srgbClr val="22253A"/>
+            <a:pPr indent="0" marL="0">
+              <a:spcAft>
+                <a:spcPts val="600"/>
+              </a:spcAft>
+              <a:buNone/>
+            </a:pPr>
+            <a:r>
+              <a:rPr lang="en-US" sz="1500" b="1" dirty="0">
+                <a:solidFill>
+                  <a:srgbClr val="F28C28"/>
                 </a:solidFill>
                 <a:latin typeface="Calibri" pitchFamily="34" charset="0"/>
                 <a:ea typeface="Calibri" pitchFamily="34" charset="-122"/>
                 <a:cs typeface="Calibri" pitchFamily="34" charset="-120"/>
               </a:rPr>
-              <a:t>effect omesso = "Allow".   Il JSON si legge con .json   ·   :root = l'account intero, NON l'utente root</a:t>
-            </a:r>
-            <a:endParaRPr lang="en-US" sz="1600" dirty="0"/>
+              <a:t>Sotto: lo statement JSON generato</a:t>
+            </a:r>
+            <a:endParaRPr lang="en-US" sz="1500" dirty="0"/>
+          </a:p>
+          <a:p>
+            <a:pPr marL="342900" indent="-342900">
+              <a:spcAft>
+                <a:spcPts val="600"/>
+              </a:spcAft>
+              <a:buSzPct val="100000"/>
+              <a:buChar char="•"/>
+            </a:pPr>
+            <a:r>
+              <a:rPr lang="en-US" sz="1500" b="1" dirty="0">
+                <a:solidFill>
+                  <a:srgbClr val="22253A"/>
+                </a:solidFill>
+                <a:latin typeface="Calibri" pitchFamily="34" charset="0"/>
+                <a:ea typeface="Calibri" pitchFamily="34" charset="-122"/>
+                <a:cs typeface="Calibri" pitchFamily="34" charset="-120"/>
+              </a:rPr>
+              <a:t>effect omesso = Allow</a:t>
+            </a:r>
+            <a:endParaRPr lang="en-US" sz="1500" dirty="0"/>
+          </a:p>
+          <a:p>
+            <a:pPr marL="342900" indent="-342900">
+              <a:spcAft>
+                <a:spcPts val="600"/>
+              </a:spcAft>
+              <a:buSzPct val="100000"/>
+              <a:buChar char="•"/>
+            </a:pPr>
+            <a:r>
+              <a:rPr lang="en-US" sz="1500" dirty="0">
+                <a:solidFill>
+                  <a:srgbClr val="22253A"/>
+                </a:solidFill>
+                <a:latin typeface="Calibri" pitchFamily="34" charset="0"/>
+                <a:ea typeface="Calibri" pitchFamily="34" charset="-122"/>
+                <a:cs typeface="Calibri" pitchFamily="34" charset="-120"/>
+              </a:rPr>
+              <a:t>il JSON si legge con .json</a:t>
+            </a:r>
+            <a:endParaRPr lang="en-US" sz="1500" dirty="0"/>
+          </a:p>
+          <a:p>
+            <a:pPr marL="342900" indent="-342900">
+              <a:spcAft>
+                <a:spcPts val="600"/>
+              </a:spcAft>
+              <a:buSzPct val="100000"/>
+              <a:buChar char="•"/>
+            </a:pPr>
+            <a:r>
+              <a:rPr lang="en-US" sz="1500" dirty="0">
+                <a:solidFill>
+                  <a:srgbClr val="22253A"/>
+                </a:solidFill>
+                <a:latin typeface="Calibri" pitchFamily="34" charset="0"/>
+                <a:ea typeface="Calibri" pitchFamily="34" charset="-122"/>
+                <a:cs typeface="Calibri" pitchFamily="34" charset="-120"/>
+              </a:rPr>
+              <a:t>:root = l'account intero, NON l'utente root</a:t>
+            </a:r>
+            <a:endParaRPr lang="en-US" sz="1500" dirty="0"/>
           </a:p>
         </p:txBody>
       </p:sp>
@@ -7519,1959 +7573,1125 @@
           </a:p>
         </p:txBody>
       </p:sp>
-      <p:graphicFrame>
-        <p:nvGraphicFramePr>
-          <p:cNvPr id="16" name="Table 0"/>
-          <p:cNvGraphicFramePr>
-            <a:graphicFrameLocks noGrp="1"/>
-          </p:cNvGraphicFramePr>
-          <p:nvPr>
-            <p:extLst>
-              <p:ext uri="{D42A27DB-BD31-4B8C-83A1-F6EECF244321}">
-                <p14:modId xmlns:p14="http://schemas.microsoft.com/office/powerpoint/2010/main" val="1579011935"/>
-              </p:ext>
-            </p:extLst>
-          </p:nvPr>
-        </p:nvGraphicFramePr>
-        <p:xfrm>
-          <a:off x="548640" y="1463040"/>
-          <a:ext cx="11094415" cy="914400"/>
-        </p:xfrm>
-        <a:graphic>
-          <a:graphicData uri="http://schemas.openxmlformats.org/drawingml/2006/table">
-            <a:tbl>
-              <a:tblPr/>
-              <a:tblGrid>
-                <a:gridCol w="548640"/>
-                <a:gridCol w="4846320"/>
-                <a:gridCol w="2377440"/>
-                <a:gridCol w="3319272"/>
-              </a:tblGrid>
-              <a:tr h="566928">
-                <a:tc>
-                  <a:txBody>
-                    <a:bodyPr/>
-                    <a:lstStyle/>
-                    <a:p>
-                      <a:pPr indent="0" marL="0">
-                        <a:buNone/>
-                      </a:pPr>
-                      <a:r>
-                        <a:rPr lang="en-US" sz="1500" b="1" dirty="0">
-                          <a:solidFill>
-                            <a:srgbClr val="FFFFFF"/>
-                          </a:solidFill>
-                          <a:latin typeface="Calibri" pitchFamily="34" charset="0"/>
-                          <a:ea typeface="Calibri" pitchFamily="34" charset="-122"/>
-                          <a:cs typeface="Calibri" pitchFamily="34" charset="-120"/>
-                        </a:rPr>
-                        <a:t>#</a:t>
-                      </a:r>
-                      <a:endParaRPr lang="en-US" sz="1500" dirty="0">
-                        <a:latin typeface="Calibri" charset="0"/>
-                        <a:ea typeface="Calibri" charset="0"/>
-                        <a:cs typeface="Calibri" charset="0"/>
-                      </a:endParaRPr>
-                    </a:p>
-                  </a:txBody>
-                  <a:tcPr marL="73152" marR="73152" marT="73152" marB="73152" anchor="ctr">
-                    <a:lnL w="9525" cap="flat" cmpd="sng" algn="ctr">
-                      <a:solidFill>
-                        <a:srgbClr val="D9D6EC"/>
-                      </a:solidFill>
-                      <a:prstDash val="solid"/>
-                      <a:round/>
-                      <a:headEnd type="none" w="med" len="med"/>
-                      <a:tailEnd type="none" w="med" len="med"/>
-                    </a:lnL>
-                    <a:lnR w="9525" cap="flat" cmpd="sng" algn="ctr">
-                      <a:solidFill>
-                        <a:srgbClr val="D9D6EC"/>
-                      </a:solidFill>
-                      <a:prstDash val="solid"/>
-                      <a:round/>
-                      <a:headEnd type="none" w="med" len="med"/>
-                      <a:tailEnd type="none" w="med" len="med"/>
-                    </a:lnR>
-                    <a:lnT w="9525" cap="flat" cmpd="sng" algn="ctr">
-                      <a:solidFill>
-                        <a:srgbClr val="D9D6EC"/>
-                      </a:solidFill>
-                      <a:prstDash val="solid"/>
-                      <a:round/>
-                      <a:headEnd type="none" w="med" len="med"/>
-                      <a:tailEnd type="none" w="med" len="med"/>
-                    </a:lnT>
-                    <a:lnB w="9525" cap="flat" cmpd="sng" algn="ctr">
-                      <a:solidFill>
-                        <a:srgbClr val="D9D6EC"/>
-                      </a:solidFill>
-                      <a:prstDash val="solid"/>
-                      <a:round/>
-                      <a:headEnd type="none" w="med" len="med"/>
-                      <a:tailEnd type="none" w="med" len="med"/>
-                    </a:lnB>
-                    <a:solidFill>
-                      <a:srgbClr val="5B3FD0"/>
-                    </a:solidFill>
-                  </a:tcPr>
-                </a:tc>
-                <a:tc>
-                  <a:txBody>
-                    <a:bodyPr/>
-                    <a:lstStyle/>
-                    <a:p>
-                      <a:pPr indent="0" marL="0">
-                        <a:buNone/>
-                      </a:pPr>
-                      <a:r>
-                        <a:rPr lang="en-US" sz="1500" b="1" dirty="0">
-                          <a:solidFill>
-                            <a:srgbClr val="FFFFFF"/>
-                          </a:solidFill>
-                          <a:latin typeface="Calibri" pitchFamily="34" charset="0"/>
-                          <a:ea typeface="Calibri" pitchFamily="34" charset="-122"/>
-                          <a:cs typeface="Calibri" pitchFamily="34" charset="-120"/>
-                        </a:rPr>
-                        <a:t>Comando</a:t>
-                      </a:r>
-                      <a:endParaRPr lang="en-US" sz="1500" dirty="0">
-                        <a:latin typeface="Calibri" charset="0"/>
-                        <a:ea typeface="Calibri" charset="0"/>
-                        <a:cs typeface="Calibri" charset="0"/>
-                      </a:endParaRPr>
-                    </a:p>
-                  </a:txBody>
-                  <a:tcPr marL="73152" marR="73152" marT="73152" marB="73152" anchor="ctr">
-                    <a:lnL w="9525" cap="flat" cmpd="sng" algn="ctr">
-                      <a:solidFill>
-                        <a:srgbClr val="D9D6EC"/>
-                      </a:solidFill>
-                      <a:prstDash val="solid"/>
-                      <a:round/>
-                      <a:headEnd type="none" w="med" len="med"/>
-                      <a:tailEnd type="none" w="med" len="med"/>
-                    </a:lnL>
-                    <a:lnR w="9525" cap="flat" cmpd="sng" algn="ctr">
-                      <a:solidFill>
-                        <a:srgbClr val="D9D6EC"/>
-                      </a:solidFill>
-                      <a:prstDash val="solid"/>
-                      <a:round/>
-                      <a:headEnd type="none" w="med" len="med"/>
-                      <a:tailEnd type="none" w="med" len="med"/>
-                    </a:lnR>
-                    <a:lnT w="9525" cap="flat" cmpd="sng" algn="ctr">
-                      <a:solidFill>
-                        <a:srgbClr val="D9D6EC"/>
-                      </a:solidFill>
-                      <a:prstDash val="solid"/>
-                      <a:round/>
-                      <a:headEnd type="none" w="med" len="med"/>
-                      <a:tailEnd type="none" w="med" len="med"/>
-                    </a:lnT>
-                    <a:lnB w="9525" cap="flat" cmpd="sng" algn="ctr">
-                      <a:solidFill>
-                        <a:srgbClr val="D9D6EC"/>
-                      </a:solidFill>
-                      <a:prstDash val="solid"/>
-                      <a:round/>
-                      <a:headEnd type="none" w="med" len="med"/>
-                      <a:tailEnd type="none" w="med" len="med"/>
-                    </a:lnB>
-                    <a:solidFill>
-                      <a:srgbClr val="5B3FD0"/>
-                    </a:solidFill>
-                  </a:tcPr>
-                </a:tc>
-                <a:tc>
-                  <a:txBody>
-                    <a:bodyPr/>
-                    <a:lstStyle/>
-                    <a:p>
-                      <a:pPr indent="0" marL="0">
-                        <a:buNone/>
-                      </a:pPr>
-                      <a:r>
-                        <a:rPr lang="en-US" sz="1500" b="1" dirty="0">
-                          <a:solidFill>
-                            <a:srgbClr val="FFFFFF"/>
-                          </a:solidFill>
-                          <a:latin typeface="Calibri" pitchFamily="34" charset="0"/>
-                          <a:ea typeface="Calibri" pitchFamily="34" charset="-122"/>
-                          <a:cs typeface="Calibri" pitchFamily="34" charset="-120"/>
-                        </a:rPr>
-                        <a:t>Azione IAM</a:t>
-                      </a:r>
-                      <a:endParaRPr lang="en-US" sz="1500" dirty="0">
-                        <a:latin typeface="Calibri" charset="0"/>
-                        <a:ea typeface="Calibri" charset="0"/>
-                        <a:cs typeface="Calibri" charset="0"/>
-                      </a:endParaRPr>
-                    </a:p>
-                  </a:txBody>
-                  <a:tcPr marL="73152" marR="73152" marT="73152" marB="73152" anchor="ctr">
-                    <a:lnL w="9525" cap="flat" cmpd="sng" algn="ctr">
-                      <a:solidFill>
-                        <a:srgbClr val="D9D6EC"/>
-                      </a:solidFill>
-                      <a:prstDash val="solid"/>
-                      <a:round/>
-                      <a:headEnd type="none" w="med" len="med"/>
-                      <a:tailEnd type="none" w="med" len="med"/>
-                    </a:lnL>
-                    <a:lnR w="9525" cap="flat" cmpd="sng" algn="ctr">
-                      <a:solidFill>
-                        <a:srgbClr val="D9D6EC"/>
-                      </a:solidFill>
-                      <a:prstDash val="solid"/>
-                      <a:round/>
-                      <a:headEnd type="none" w="med" len="med"/>
-                      <a:tailEnd type="none" w="med" len="med"/>
-                    </a:lnR>
-                    <a:lnT w="9525" cap="flat" cmpd="sng" algn="ctr">
-                      <a:solidFill>
-                        <a:srgbClr val="D9D6EC"/>
-                      </a:solidFill>
-                      <a:prstDash val="solid"/>
-                      <a:round/>
-                      <a:headEnd type="none" w="med" len="med"/>
-                      <a:tailEnd type="none" w="med" len="med"/>
-                    </a:lnT>
-                    <a:lnB w="9525" cap="flat" cmpd="sng" algn="ctr">
-                      <a:solidFill>
-                        <a:srgbClr val="D9D6EC"/>
-                      </a:solidFill>
-                      <a:prstDash val="solid"/>
-                      <a:round/>
-                      <a:headEnd type="none" w="med" len="med"/>
-                      <a:tailEnd type="none" w="med" len="med"/>
-                    </a:lnB>
-                    <a:solidFill>
-                      <a:srgbClr val="5B3FD0"/>
-                    </a:solidFill>
-                  </a:tcPr>
-                </a:tc>
-                <a:tc>
-                  <a:txBody>
-                    <a:bodyPr/>
-                    <a:lstStyle/>
-                    <a:p>
-                      <a:pPr indent="0" marL="0">
-                        <a:buNone/>
-                      </a:pPr>
-                      <a:r>
-                        <a:rPr lang="en-US" sz="1500" b="1" dirty="0">
-                          <a:solidFill>
-                            <a:srgbClr val="FFFFFF"/>
-                          </a:solidFill>
-                          <a:latin typeface="Calibri" pitchFamily="34" charset="0"/>
-                          <a:ea typeface="Calibri" pitchFamily="34" charset="-122"/>
-                          <a:cs typeface="Calibri" pitchFamily="34" charset="-120"/>
-                        </a:rPr>
-                        <a:t>Atteso</a:t>
-                      </a:r>
-                      <a:endParaRPr lang="en-US" sz="1500" dirty="0">
-                        <a:latin typeface="Calibri" charset="0"/>
-                        <a:ea typeface="Calibri" charset="0"/>
-                        <a:cs typeface="Calibri" charset="0"/>
-                      </a:endParaRPr>
-                    </a:p>
-                  </a:txBody>
-                  <a:tcPr marL="73152" marR="73152" marT="73152" marB="73152" anchor="ctr">
-                    <a:lnL w="9525" cap="flat" cmpd="sng" algn="ctr">
-                      <a:solidFill>
-                        <a:srgbClr val="D9D6EC"/>
-                      </a:solidFill>
-                      <a:prstDash val="solid"/>
-                      <a:round/>
-                      <a:headEnd type="none" w="med" len="med"/>
-                      <a:tailEnd type="none" w="med" len="med"/>
-                    </a:lnL>
-                    <a:lnR w="9525" cap="flat" cmpd="sng" algn="ctr">
-                      <a:solidFill>
-                        <a:srgbClr val="D9D6EC"/>
-                      </a:solidFill>
-                      <a:prstDash val="solid"/>
-                      <a:round/>
-                      <a:headEnd type="none" w="med" len="med"/>
-                      <a:tailEnd type="none" w="med" len="med"/>
-                    </a:lnR>
-                    <a:lnT w="9525" cap="flat" cmpd="sng" algn="ctr">
-                      <a:solidFill>
-                        <a:srgbClr val="D9D6EC"/>
-                      </a:solidFill>
-                      <a:prstDash val="solid"/>
-                      <a:round/>
-                      <a:headEnd type="none" w="med" len="med"/>
-                      <a:tailEnd type="none" w="med" len="med"/>
-                    </a:lnT>
-                    <a:lnB w="9525" cap="flat" cmpd="sng" algn="ctr">
-                      <a:solidFill>
-                        <a:srgbClr val="D9D6EC"/>
-                      </a:solidFill>
-                      <a:prstDash val="solid"/>
-                      <a:round/>
-                      <a:headEnd type="none" w="med" len="med"/>
-                      <a:tailEnd type="none" w="med" len="med"/>
-                    </a:lnB>
-                    <a:solidFill>
-                      <a:srgbClr val="5B3FD0"/>
-                    </a:solidFill>
-                  </a:tcPr>
-                </a:tc>
-              </a:tr>
-              <a:tr h="566928">
-                <a:tc>
-                  <a:txBody>
-                    <a:bodyPr/>
-                    <a:lstStyle/>
-                    <a:p>
-                      <a:pPr indent="0" marL="0">
-                        <a:buNone/>
-                      </a:pPr>
-                      <a:r>
-                        <a:rPr lang="en-US" sz="1500" dirty="0">
-                          <a:solidFill>
-                            <a:srgbClr val="22253A"/>
-                          </a:solidFill>
-                          <a:latin typeface="Calibri" pitchFamily="34" charset="0"/>
-                          <a:ea typeface="Calibri" pitchFamily="34" charset="-122"/>
-                          <a:cs typeface="Calibri" pitchFamily="34" charset="-120"/>
-                        </a:rPr>
-                        <a:t>1</a:t>
-                      </a:r>
-                      <a:endParaRPr lang="en-US" sz="1500" dirty="0">
-                        <a:latin typeface="Calibri" charset="0"/>
-                        <a:ea typeface="Calibri" charset="0"/>
-                        <a:cs typeface="Calibri" charset="0"/>
-                      </a:endParaRPr>
-                    </a:p>
-                  </a:txBody>
-                  <a:tcPr marL="73152" marR="73152" marT="73152" marB="73152" anchor="ctr">
-                    <a:lnL w="9525" cap="flat" cmpd="sng" algn="ctr">
-                      <a:solidFill>
-                        <a:srgbClr val="D9D6EC"/>
-                      </a:solidFill>
-                      <a:prstDash val="solid"/>
-                      <a:round/>
-                      <a:headEnd type="none" w="med" len="med"/>
-                      <a:tailEnd type="none" w="med" len="med"/>
-                    </a:lnL>
-                    <a:lnR w="9525" cap="flat" cmpd="sng" algn="ctr">
-                      <a:solidFill>
-                        <a:srgbClr val="D9D6EC"/>
-                      </a:solidFill>
-                      <a:prstDash val="solid"/>
-                      <a:round/>
-                      <a:headEnd type="none" w="med" len="med"/>
-                      <a:tailEnd type="none" w="med" len="med"/>
-                    </a:lnR>
-                    <a:lnT w="9525" cap="flat" cmpd="sng" algn="ctr">
-                      <a:solidFill>
-                        <a:srgbClr val="D9D6EC"/>
-                      </a:solidFill>
-                      <a:prstDash val="solid"/>
-                      <a:round/>
-                      <a:headEnd type="none" w="med" len="med"/>
-                      <a:tailEnd type="none" w="med" len="med"/>
-                    </a:lnT>
-                    <a:lnB w="9525" cap="flat" cmpd="sng" algn="ctr">
-                      <a:solidFill>
-                        <a:srgbClr val="D9D6EC"/>
-                      </a:solidFill>
-                      <a:prstDash val="solid"/>
-                      <a:round/>
-                      <a:headEnd type="none" w="med" len="med"/>
-                      <a:tailEnd type="none" w="med" len="med"/>
-                    </a:lnB>
-                    <a:solidFill>
-                      <a:srgbClr val="FFFFFF"/>
-                    </a:solidFill>
-                  </a:tcPr>
-                </a:tc>
-                <a:tc>
-                  <a:txBody>
-                    <a:bodyPr/>
-                    <a:lstStyle/>
-                    <a:p>
-                      <a:pPr indent="0" marL="0">
-                        <a:buNone/>
-                      </a:pPr>
-                      <a:r>
-                        <a:rPr lang="en-US" sz="1500" dirty="0">
-                          <a:solidFill>
-                            <a:srgbClr val="22253A"/>
-                          </a:solidFill>
-                          <a:latin typeface="Courier New" pitchFamily="34" charset="0"/>
-                          <a:ea typeface="Courier New" pitchFamily="34" charset="-122"/>
-                          <a:cs typeface="Courier New" pitchFamily="34" charset="-120"/>
-                        </a:rPr>
-                        <a:t>aws sts get-caller-identity</a:t>
-                      </a:r>
-                      <a:endParaRPr lang="en-US" sz="1500" dirty="0">
-                        <a:latin typeface="Courier New" charset="0"/>
-                        <a:ea typeface="Courier New" charset="0"/>
-                        <a:cs typeface="Courier New" charset="0"/>
-                      </a:endParaRPr>
-                    </a:p>
-                  </a:txBody>
-                  <a:tcPr marL="73152" marR="73152" marT="73152" marB="73152" anchor="ctr">
-                    <a:lnL w="9525" cap="flat" cmpd="sng" algn="ctr">
-                      <a:solidFill>
-                        <a:srgbClr val="D9D6EC"/>
-                      </a:solidFill>
-                      <a:prstDash val="solid"/>
-                      <a:round/>
-                      <a:headEnd type="none" w="med" len="med"/>
-                      <a:tailEnd type="none" w="med" len="med"/>
-                    </a:lnL>
-                    <a:lnR w="9525" cap="flat" cmpd="sng" algn="ctr">
-                      <a:solidFill>
-                        <a:srgbClr val="D9D6EC"/>
-                      </a:solidFill>
-                      <a:prstDash val="solid"/>
-                      <a:round/>
-                      <a:headEnd type="none" w="med" len="med"/>
-                      <a:tailEnd type="none" w="med" len="med"/>
-                    </a:lnR>
-                    <a:lnT w="9525" cap="flat" cmpd="sng" algn="ctr">
-                      <a:solidFill>
-                        <a:srgbClr val="D9D6EC"/>
-                      </a:solidFill>
-                      <a:prstDash val="solid"/>
-                      <a:round/>
-                      <a:headEnd type="none" w="med" len="med"/>
-                      <a:tailEnd type="none" w="med" len="med"/>
-                    </a:lnT>
-                    <a:lnB w="9525" cap="flat" cmpd="sng" algn="ctr">
-                      <a:solidFill>
-                        <a:srgbClr val="D9D6EC"/>
-                      </a:solidFill>
-                      <a:prstDash val="solid"/>
-                      <a:round/>
-                      <a:headEnd type="none" w="med" len="med"/>
-                      <a:tailEnd type="none" w="med" len="med"/>
-                    </a:lnB>
-                    <a:solidFill>
-                      <a:srgbClr val="FFFFFF"/>
-                    </a:solidFill>
-                  </a:tcPr>
-                </a:tc>
-                <a:tc>
-                  <a:txBody>
-                    <a:bodyPr/>
-                    <a:lstStyle/>
-                    <a:p>
-                      <a:pPr indent="0" marL="0">
-                        <a:buNone/>
-                      </a:pPr>
-                      <a:r>
-                        <a:rPr lang="en-US" sz="1500" dirty="0">
-                          <a:solidFill>
-                            <a:srgbClr val="22253A"/>
-                          </a:solidFill>
-                          <a:latin typeface="Calibri" pitchFamily="34" charset="0"/>
-                          <a:ea typeface="Calibri" pitchFamily="34" charset="-122"/>
-                          <a:cs typeface="Calibri" pitchFamily="34" charset="-120"/>
-                        </a:rPr>
-                        <a:t>–</a:t>
-                      </a:r>
-                      <a:endParaRPr lang="en-US" sz="1500" dirty="0">
-                        <a:latin typeface="Calibri" charset="0"/>
-                        <a:ea typeface="Calibri" charset="0"/>
-                        <a:cs typeface="Calibri" charset="0"/>
-                      </a:endParaRPr>
-                    </a:p>
-                  </a:txBody>
-                  <a:tcPr marL="73152" marR="73152" marT="73152" marB="73152" anchor="ctr">
-                    <a:lnL w="9525" cap="flat" cmpd="sng" algn="ctr">
-                      <a:solidFill>
-                        <a:srgbClr val="D9D6EC"/>
-                      </a:solidFill>
-                      <a:prstDash val="solid"/>
-                      <a:round/>
-                      <a:headEnd type="none" w="med" len="med"/>
-                      <a:tailEnd type="none" w="med" len="med"/>
-                    </a:lnL>
-                    <a:lnR w="9525" cap="flat" cmpd="sng" algn="ctr">
-                      <a:solidFill>
-                        <a:srgbClr val="D9D6EC"/>
-                      </a:solidFill>
-                      <a:prstDash val="solid"/>
-                      <a:round/>
-                      <a:headEnd type="none" w="med" len="med"/>
-                      <a:tailEnd type="none" w="med" len="med"/>
-                    </a:lnR>
-                    <a:lnT w="9525" cap="flat" cmpd="sng" algn="ctr">
-                      <a:solidFill>
-                        <a:srgbClr val="D9D6EC"/>
-                      </a:solidFill>
-                      <a:prstDash val="solid"/>
-                      <a:round/>
-                      <a:headEnd type="none" w="med" len="med"/>
-                      <a:tailEnd type="none" w="med" len="med"/>
-                    </a:lnT>
-                    <a:lnB w="9525" cap="flat" cmpd="sng" algn="ctr">
-                      <a:solidFill>
-                        <a:srgbClr val="D9D6EC"/>
-                      </a:solidFill>
-                      <a:prstDash val="solid"/>
-                      <a:round/>
-                      <a:headEnd type="none" w="med" len="med"/>
-                      <a:tailEnd type="none" w="med" len="med"/>
-                    </a:lnB>
-                    <a:solidFill>
-                      <a:srgbClr val="FFFFFF"/>
-                    </a:solidFill>
-                  </a:tcPr>
-                </a:tc>
-                <a:tc>
-                  <a:txBody>
-                    <a:bodyPr/>
-                    <a:lstStyle/>
-                    <a:p>
-                      <a:pPr indent="0" marL="0">
-                        <a:buNone/>
-                      </a:pPr>
-                      <a:r>
-                        <a:rPr lang="en-US" sz="1500" dirty="0">
-                          <a:solidFill>
-                            <a:srgbClr val="22253A"/>
-                          </a:solidFill>
-                          <a:latin typeface="Calibri" pitchFamily="34" charset="0"/>
-                          <a:ea typeface="Calibri" pitchFamily="34" charset="-122"/>
-                          <a:cs typeface="Calibri" pitchFamily="34" charset="-120"/>
-                        </a:rPr>
-                        <a:t>assumed-role/…-artifact-reader</a:t>
-                      </a:r>
-                      <a:endParaRPr lang="en-US" sz="1500" dirty="0">
-                        <a:latin typeface="Calibri" charset="0"/>
-                        <a:ea typeface="Calibri" charset="0"/>
-                        <a:cs typeface="Calibri" charset="0"/>
-                      </a:endParaRPr>
-                    </a:p>
-                  </a:txBody>
-                  <a:tcPr marL="73152" marR="73152" marT="73152" marB="73152" anchor="ctr">
-                    <a:lnL w="9525" cap="flat" cmpd="sng" algn="ctr">
-                      <a:solidFill>
-                        <a:srgbClr val="D9D6EC"/>
-                      </a:solidFill>
-                      <a:prstDash val="solid"/>
-                      <a:round/>
-                      <a:headEnd type="none" w="med" len="med"/>
-                      <a:tailEnd type="none" w="med" len="med"/>
-                    </a:lnL>
-                    <a:lnR w="9525" cap="flat" cmpd="sng" algn="ctr">
-                      <a:solidFill>
-                        <a:srgbClr val="D9D6EC"/>
-                      </a:solidFill>
-                      <a:prstDash val="solid"/>
-                      <a:round/>
-                      <a:headEnd type="none" w="med" len="med"/>
-                      <a:tailEnd type="none" w="med" len="med"/>
-                    </a:lnR>
-                    <a:lnT w="9525" cap="flat" cmpd="sng" algn="ctr">
-                      <a:solidFill>
-                        <a:srgbClr val="D9D6EC"/>
-                      </a:solidFill>
-                      <a:prstDash val="solid"/>
-                      <a:round/>
-                      <a:headEnd type="none" w="med" len="med"/>
-                      <a:tailEnd type="none" w="med" len="med"/>
-                    </a:lnT>
-                    <a:lnB w="9525" cap="flat" cmpd="sng" algn="ctr">
-                      <a:solidFill>
-                        <a:srgbClr val="D9D6EC"/>
-                      </a:solidFill>
-                      <a:prstDash val="solid"/>
-                      <a:round/>
-                      <a:headEnd type="none" w="med" len="med"/>
-                      <a:tailEnd type="none" w="med" len="med"/>
-                    </a:lnB>
-                    <a:solidFill>
-                      <a:srgbClr val="FFFFFF"/>
-                    </a:solidFill>
-                  </a:tcPr>
-                </a:tc>
-              </a:tr>
-              <a:tr h="566928">
-                <a:tc>
-                  <a:txBody>
-                    <a:bodyPr/>
-                    <a:lstStyle/>
-                    <a:p>
-                      <a:pPr indent="0" marL="0">
-                        <a:buNone/>
-                      </a:pPr>
-                      <a:r>
-                        <a:rPr lang="en-US" sz="1500" dirty="0">
-                          <a:solidFill>
-                            <a:srgbClr val="22253A"/>
-                          </a:solidFill>
-                          <a:latin typeface="Calibri" pitchFamily="34" charset="0"/>
-                          <a:ea typeface="Calibri" pitchFamily="34" charset="-122"/>
-                          <a:cs typeface="Calibri" pitchFamily="34" charset="-120"/>
-                        </a:rPr>
-                        <a:t>2</a:t>
-                      </a:r>
-                      <a:endParaRPr lang="en-US" sz="1500" dirty="0">
-                        <a:latin typeface="Calibri" charset="0"/>
-                        <a:ea typeface="Calibri" charset="0"/>
-                        <a:cs typeface="Calibri" charset="0"/>
-                      </a:endParaRPr>
-                    </a:p>
-                  </a:txBody>
-                  <a:tcPr marL="73152" marR="73152" marT="73152" marB="73152" anchor="ctr">
-                    <a:lnL w="9525" cap="flat" cmpd="sng" algn="ctr">
-                      <a:solidFill>
-                        <a:srgbClr val="D9D6EC"/>
-                      </a:solidFill>
-                      <a:prstDash val="solid"/>
-                      <a:round/>
-                      <a:headEnd type="none" w="med" len="med"/>
-                      <a:tailEnd type="none" w="med" len="med"/>
-                    </a:lnL>
-                    <a:lnR w="9525" cap="flat" cmpd="sng" algn="ctr">
-                      <a:solidFill>
-                        <a:srgbClr val="D9D6EC"/>
-                      </a:solidFill>
-                      <a:prstDash val="solid"/>
-                      <a:round/>
-                      <a:headEnd type="none" w="med" len="med"/>
-                      <a:tailEnd type="none" w="med" len="med"/>
-                    </a:lnR>
-                    <a:lnT w="9525" cap="flat" cmpd="sng" algn="ctr">
-                      <a:solidFill>
-                        <a:srgbClr val="D9D6EC"/>
-                      </a:solidFill>
-                      <a:prstDash val="solid"/>
-                      <a:round/>
-                      <a:headEnd type="none" w="med" len="med"/>
-                      <a:tailEnd type="none" w="med" len="med"/>
-                    </a:lnT>
-                    <a:lnB w="9525" cap="flat" cmpd="sng" algn="ctr">
-                      <a:solidFill>
-                        <a:srgbClr val="D9D6EC"/>
-                      </a:solidFill>
-                      <a:prstDash val="solid"/>
-                      <a:round/>
-                      <a:headEnd type="none" w="med" len="med"/>
-                      <a:tailEnd type="none" w="med" len="med"/>
-                    </a:lnB>
-                    <a:solidFill>
-                      <a:srgbClr val="F7F6FD"/>
-                    </a:solidFill>
-                  </a:tcPr>
-                </a:tc>
-                <a:tc>
-                  <a:txBody>
-                    <a:bodyPr/>
-                    <a:lstStyle/>
-                    <a:p>
-                      <a:pPr indent="0" marL="0">
-                        <a:buNone/>
-                      </a:pPr>
-                      <a:r>
-                        <a:rPr lang="en-US" sz="1500" dirty="0">
-                          <a:solidFill>
-                            <a:srgbClr val="22253A"/>
-                          </a:solidFill>
-                          <a:latin typeface="Courier New" pitchFamily="34" charset="0"/>
-                          <a:ea typeface="Courier New" pitchFamily="34" charset="-122"/>
-                          <a:cs typeface="Courier New" pitchFamily="34" charset="-120"/>
-                        </a:rPr>
-                        <a:t>aws s3 cp …/releases/app-v1.0.txt -</a:t>
-                      </a:r>
-                      <a:endParaRPr lang="en-US" sz="1500" dirty="0">
-                        <a:latin typeface="Courier New" charset="0"/>
-                        <a:ea typeface="Courier New" charset="0"/>
-                        <a:cs typeface="Courier New" charset="0"/>
-                      </a:endParaRPr>
-                    </a:p>
-                  </a:txBody>
-                  <a:tcPr marL="73152" marR="73152" marT="73152" marB="73152" anchor="ctr">
-                    <a:lnL w="9525" cap="flat" cmpd="sng" algn="ctr">
-                      <a:solidFill>
-                        <a:srgbClr val="D9D6EC"/>
-                      </a:solidFill>
-                      <a:prstDash val="solid"/>
-                      <a:round/>
-                      <a:headEnd type="none" w="med" len="med"/>
-                      <a:tailEnd type="none" w="med" len="med"/>
-                    </a:lnL>
-                    <a:lnR w="9525" cap="flat" cmpd="sng" algn="ctr">
-                      <a:solidFill>
-                        <a:srgbClr val="D9D6EC"/>
-                      </a:solidFill>
-                      <a:prstDash val="solid"/>
-                      <a:round/>
-                      <a:headEnd type="none" w="med" len="med"/>
-                      <a:tailEnd type="none" w="med" len="med"/>
-                    </a:lnR>
-                    <a:lnT w="9525" cap="flat" cmpd="sng" algn="ctr">
-                      <a:solidFill>
-                        <a:srgbClr val="D9D6EC"/>
-                      </a:solidFill>
-                      <a:prstDash val="solid"/>
-                      <a:round/>
-                      <a:headEnd type="none" w="med" len="med"/>
-                      <a:tailEnd type="none" w="med" len="med"/>
-                    </a:lnT>
-                    <a:lnB w="9525" cap="flat" cmpd="sng" algn="ctr">
-                      <a:solidFill>
-                        <a:srgbClr val="D9D6EC"/>
-                      </a:solidFill>
-                      <a:prstDash val="solid"/>
-                      <a:round/>
-                      <a:headEnd type="none" w="med" len="med"/>
-                      <a:tailEnd type="none" w="med" len="med"/>
-                    </a:lnB>
-                    <a:solidFill>
-                      <a:srgbClr val="F7F6FD"/>
-                    </a:solidFill>
-                  </a:tcPr>
-                </a:tc>
-                <a:tc>
-                  <a:txBody>
-                    <a:bodyPr/>
-                    <a:lstStyle/>
-                    <a:p>
-                      <a:pPr indent="0" marL="0">
-                        <a:buNone/>
-                      </a:pPr>
-                      <a:r>
-                        <a:rPr lang="en-US" sz="1500" dirty="0">
-                          <a:solidFill>
-                            <a:srgbClr val="22253A"/>
-                          </a:solidFill>
-                          <a:latin typeface="Courier New" pitchFamily="34" charset="0"/>
-                          <a:ea typeface="Courier New" pitchFamily="34" charset="-122"/>
-                          <a:cs typeface="Courier New" pitchFamily="34" charset="-120"/>
-                        </a:rPr>
-                        <a:t>s3:GetObject</a:t>
-                      </a:r>
-                      <a:endParaRPr lang="en-US" sz="1500" dirty="0">
-                        <a:latin typeface="Courier New" charset="0"/>
-                        <a:ea typeface="Courier New" charset="0"/>
-                        <a:cs typeface="Courier New" charset="0"/>
-                      </a:endParaRPr>
-                    </a:p>
-                  </a:txBody>
-                  <a:tcPr marL="73152" marR="73152" marT="73152" marB="73152" anchor="ctr">
-                    <a:lnL w="9525" cap="flat" cmpd="sng" algn="ctr">
-                      <a:solidFill>
-                        <a:srgbClr val="D9D6EC"/>
-                      </a:solidFill>
-                      <a:prstDash val="solid"/>
-                      <a:round/>
-                      <a:headEnd type="none" w="med" len="med"/>
-                      <a:tailEnd type="none" w="med" len="med"/>
-                    </a:lnL>
-                    <a:lnR w="9525" cap="flat" cmpd="sng" algn="ctr">
-                      <a:solidFill>
-                        <a:srgbClr val="D9D6EC"/>
-                      </a:solidFill>
-                      <a:prstDash val="solid"/>
-                      <a:round/>
-                      <a:headEnd type="none" w="med" len="med"/>
-                      <a:tailEnd type="none" w="med" len="med"/>
-                    </a:lnR>
-                    <a:lnT w="9525" cap="flat" cmpd="sng" algn="ctr">
-                      <a:solidFill>
-                        <a:srgbClr val="D9D6EC"/>
-                      </a:solidFill>
-                      <a:prstDash val="solid"/>
-                      <a:round/>
-                      <a:headEnd type="none" w="med" len="med"/>
-                      <a:tailEnd type="none" w="med" len="med"/>
-                    </a:lnT>
-                    <a:lnB w="9525" cap="flat" cmpd="sng" algn="ctr">
-                      <a:solidFill>
-                        <a:srgbClr val="D9D6EC"/>
-                      </a:solidFill>
-                      <a:prstDash val="solid"/>
-                      <a:round/>
-                      <a:headEnd type="none" w="med" len="med"/>
-                      <a:tailEnd type="none" w="med" len="med"/>
-                    </a:lnB>
-                    <a:solidFill>
-                      <a:srgbClr val="F7F6FD"/>
-                    </a:solidFill>
-                  </a:tcPr>
-                </a:tc>
-                <a:tc>
-                  <a:txBody>
-                    <a:bodyPr/>
-                    <a:lstStyle/>
-                    <a:p>
-                      <a:pPr indent="0" marL="0">
-                        <a:buNone/>
-                      </a:pPr>
-                      <a:r>
-                        <a:rPr lang="en-US" sz="1500" b="1" dirty="0">
-                          <a:solidFill>
-                            <a:srgbClr val="2E9E6B"/>
-                          </a:solidFill>
-                          <a:latin typeface="Calibri" pitchFamily="34" charset="0"/>
-                          <a:ea typeface="Calibri" pitchFamily="34" charset="-122"/>
-                          <a:cs typeface="Calibri" pitchFamily="34" charset="-120"/>
-                        </a:rPr>
-                        <a:t>OK: versione 1.0</a:t>
-                      </a:r>
-                      <a:endParaRPr lang="en-US" sz="1500" dirty="0">
-                        <a:latin typeface="Calibri" charset="0"/>
-                        <a:ea typeface="Calibri" charset="0"/>
-                        <a:cs typeface="Calibri" charset="0"/>
-                      </a:endParaRPr>
-                    </a:p>
-                  </a:txBody>
-                  <a:tcPr marL="73152" marR="73152" marT="73152" marB="73152" anchor="ctr">
-                    <a:lnL w="9525" cap="flat" cmpd="sng" algn="ctr">
-                      <a:solidFill>
-                        <a:srgbClr val="D9D6EC"/>
-                      </a:solidFill>
-                      <a:prstDash val="solid"/>
-                      <a:round/>
-                      <a:headEnd type="none" w="med" len="med"/>
-                      <a:tailEnd type="none" w="med" len="med"/>
-                    </a:lnL>
-                    <a:lnR w="9525" cap="flat" cmpd="sng" algn="ctr">
-                      <a:solidFill>
-                        <a:srgbClr val="D9D6EC"/>
-                      </a:solidFill>
-                      <a:prstDash val="solid"/>
-                      <a:round/>
-                      <a:headEnd type="none" w="med" len="med"/>
-                      <a:tailEnd type="none" w="med" len="med"/>
-                    </a:lnR>
-                    <a:lnT w="9525" cap="flat" cmpd="sng" algn="ctr">
-                      <a:solidFill>
-                        <a:srgbClr val="D9D6EC"/>
-                      </a:solidFill>
-                      <a:prstDash val="solid"/>
-                      <a:round/>
-                      <a:headEnd type="none" w="med" len="med"/>
-                      <a:tailEnd type="none" w="med" len="med"/>
-                    </a:lnT>
-                    <a:lnB w="9525" cap="flat" cmpd="sng" algn="ctr">
-                      <a:solidFill>
-                        <a:srgbClr val="D9D6EC"/>
-                      </a:solidFill>
-                      <a:prstDash val="solid"/>
-                      <a:round/>
-                      <a:headEnd type="none" w="med" len="med"/>
-                      <a:tailEnd type="none" w="med" len="med"/>
-                    </a:lnB>
-                    <a:solidFill>
-                      <a:srgbClr val="F7F6FD"/>
-                    </a:solidFill>
-                  </a:tcPr>
-                </a:tc>
-              </a:tr>
-              <a:tr h="566928">
-                <a:tc>
-                  <a:txBody>
-                    <a:bodyPr/>
-                    <a:lstStyle/>
-                    <a:p>
-                      <a:pPr indent="0" marL="0">
-                        <a:buNone/>
-                      </a:pPr>
-                      <a:r>
-                        <a:rPr lang="en-US" sz="1500" dirty="0">
-                          <a:solidFill>
-                            <a:srgbClr val="22253A"/>
-                          </a:solidFill>
-                          <a:latin typeface="Calibri" pitchFamily="34" charset="0"/>
-                          <a:ea typeface="Calibri" pitchFamily="34" charset="-122"/>
-                          <a:cs typeface="Calibri" pitchFamily="34" charset="-120"/>
-                        </a:rPr>
-                        <a:t>3</a:t>
-                      </a:r>
-                      <a:endParaRPr lang="en-US" sz="1500" dirty="0">
-                        <a:latin typeface="Calibri" charset="0"/>
-                        <a:ea typeface="Calibri" charset="0"/>
-                        <a:cs typeface="Calibri" charset="0"/>
-                      </a:endParaRPr>
-                    </a:p>
-                  </a:txBody>
-                  <a:tcPr marL="73152" marR="73152" marT="73152" marB="73152" anchor="ctr">
-                    <a:lnL w="9525" cap="flat" cmpd="sng" algn="ctr">
-                      <a:solidFill>
-                        <a:srgbClr val="D9D6EC"/>
-                      </a:solidFill>
-                      <a:prstDash val="solid"/>
-                      <a:round/>
-                      <a:headEnd type="none" w="med" len="med"/>
-                      <a:tailEnd type="none" w="med" len="med"/>
-                    </a:lnL>
-                    <a:lnR w="9525" cap="flat" cmpd="sng" algn="ctr">
-                      <a:solidFill>
-                        <a:srgbClr val="D9D6EC"/>
-                      </a:solidFill>
-                      <a:prstDash val="solid"/>
-                      <a:round/>
-                      <a:headEnd type="none" w="med" len="med"/>
-                      <a:tailEnd type="none" w="med" len="med"/>
-                    </a:lnR>
-                    <a:lnT w="9525" cap="flat" cmpd="sng" algn="ctr">
-                      <a:solidFill>
-                        <a:srgbClr val="D9D6EC"/>
-                      </a:solidFill>
-                      <a:prstDash val="solid"/>
-                      <a:round/>
-                      <a:headEnd type="none" w="med" len="med"/>
-                      <a:tailEnd type="none" w="med" len="med"/>
-                    </a:lnT>
-                    <a:lnB w="9525" cap="flat" cmpd="sng" algn="ctr">
-                      <a:solidFill>
-                        <a:srgbClr val="D9D6EC"/>
-                      </a:solidFill>
-                      <a:prstDash val="solid"/>
-                      <a:round/>
-                      <a:headEnd type="none" w="med" len="med"/>
-                      <a:tailEnd type="none" w="med" len="med"/>
-                    </a:lnB>
-                    <a:solidFill>
-                      <a:srgbClr val="FFFFFF"/>
-                    </a:solidFill>
-                  </a:tcPr>
-                </a:tc>
-                <a:tc>
-                  <a:txBody>
-                    <a:bodyPr/>
-                    <a:lstStyle/>
-                    <a:p>
-                      <a:pPr indent="0" marL="0">
-                        <a:buNone/>
-                      </a:pPr>
-                      <a:r>
-                        <a:rPr lang="en-US" sz="1500" dirty="0">
-                          <a:solidFill>
-                            <a:srgbClr val="22253A"/>
-                          </a:solidFill>
-                          <a:latin typeface="Courier New" pitchFamily="34" charset="0"/>
-                          <a:ea typeface="Courier New" pitchFamily="34" charset="-122"/>
-                          <a:cs typeface="Courier New" pitchFamily="34" charset="-120"/>
-                        </a:rPr>
-                        <a:t>aws s3 ls …/releases/</a:t>
-                      </a:r>
-                      <a:endParaRPr lang="en-US" sz="1500" dirty="0">
-                        <a:latin typeface="Courier New" charset="0"/>
-                        <a:ea typeface="Courier New" charset="0"/>
-                        <a:cs typeface="Courier New" charset="0"/>
-                      </a:endParaRPr>
-                    </a:p>
-                  </a:txBody>
-                  <a:tcPr marL="73152" marR="73152" marT="73152" marB="73152" anchor="ctr">
-                    <a:lnL w="9525" cap="flat" cmpd="sng" algn="ctr">
-                      <a:solidFill>
-                        <a:srgbClr val="D9D6EC"/>
-                      </a:solidFill>
-                      <a:prstDash val="solid"/>
-                      <a:round/>
-                      <a:headEnd type="none" w="med" len="med"/>
-                      <a:tailEnd type="none" w="med" len="med"/>
-                    </a:lnL>
-                    <a:lnR w="9525" cap="flat" cmpd="sng" algn="ctr">
-                      <a:solidFill>
-                        <a:srgbClr val="D9D6EC"/>
-                      </a:solidFill>
-                      <a:prstDash val="solid"/>
-                      <a:round/>
-                      <a:headEnd type="none" w="med" len="med"/>
-                      <a:tailEnd type="none" w="med" len="med"/>
-                    </a:lnR>
-                    <a:lnT w="9525" cap="flat" cmpd="sng" algn="ctr">
-                      <a:solidFill>
-                        <a:srgbClr val="D9D6EC"/>
-                      </a:solidFill>
-                      <a:prstDash val="solid"/>
-                      <a:round/>
-                      <a:headEnd type="none" w="med" len="med"/>
-                      <a:tailEnd type="none" w="med" len="med"/>
-                    </a:lnT>
-                    <a:lnB w="9525" cap="flat" cmpd="sng" algn="ctr">
-                      <a:solidFill>
-                        <a:srgbClr val="D9D6EC"/>
-                      </a:solidFill>
-                      <a:prstDash val="solid"/>
-                      <a:round/>
-                      <a:headEnd type="none" w="med" len="med"/>
-                      <a:tailEnd type="none" w="med" len="med"/>
-                    </a:lnB>
-                    <a:solidFill>
-                      <a:srgbClr val="FFFFFF"/>
-                    </a:solidFill>
-                  </a:tcPr>
-                </a:tc>
-                <a:tc>
-                  <a:txBody>
-                    <a:bodyPr/>
-                    <a:lstStyle/>
-                    <a:p>
-                      <a:pPr indent="0" marL="0">
-                        <a:buNone/>
-                      </a:pPr>
-                      <a:r>
-                        <a:rPr lang="en-US" sz="1500" dirty="0">
-                          <a:solidFill>
-                            <a:srgbClr val="22253A"/>
-                          </a:solidFill>
-                          <a:latin typeface="Courier New" pitchFamily="34" charset="0"/>
-                          <a:ea typeface="Courier New" pitchFamily="34" charset="-122"/>
-                          <a:cs typeface="Courier New" pitchFamily="34" charset="-120"/>
-                        </a:rPr>
-                        <a:t>s3:ListBucket</a:t>
-                      </a:r>
-                      <a:endParaRPr lang="en-US" sz="1500" dirty="0">
-                        <a:latin typeface="Courier New" charset="0"/>
-                        <a:ea typeface="Courier New" charset="0"/>
-                        <a:cs typeface="Courier New" charset="0"/>
-                      </a:endParaRPr>
-                    </a:p>
-                  </a:txBody>
-                  <a:tcPr marL="73152" marR="73152" marT="73152" marB="73152" anchor="ctr">
-                    <a:lnL w="9525" cap="flat" cmpd="sng" algn="ctr">
-                      <a:solidFill>
-                        <a:srgbClr val="D9D6EC"/>
-                      </a:solidFill>
-                      <a:prstDash val="solid"/>
-                      <a:round/>
-                      <a:headEnd type="none" w="med" len="med"/>
-                      <a:tailEnd type="none" w="med" len="med"/>
-                    </a:lnL>
-                    <a:lnR w="9525" cap="flat" cmpd="sng" algn="ctr">
-                      <a:solidFill>
-                        <a:srgbClr val="D9D6EC"/>
-                      </a:solidFill>
-                      <a:prstDash val="solid"/>
-                      <a:round/>
-                      <a:headEnd type="none" w="med" len="med"/>
-                      <a:tailEnd type="none" w="med" len="med"/>
-                    </a:lnR>
-                    <a:lnT w="9525" cap="flat" cmpd="sng" algn="ctr">
-                      <a:solidFill>
-                        <a:srgbClr val="D9D6EC"/>
-                      </a:solidFill>
-                      <a:prstDash val="solid"/>
-                      <a:round/>
-                      <a:headEnd type="none" w="med" len="med"/>
-                      <a:tailEnd type="none" w="med" len="med"/>
-                    </a:lnT>
-                    <a:lnB w="9525" cap="flat" cmpd="sng" algn="ctr">
-                      <a:solidFill>
-                        <a:srgbClr val="D9D6EC"/>
-                      </a:solidFill>
-                      <a:prstDash val="solid"/>
-                      <a:round/>
-                      <a:headEnd type="none" w="med" len="med"/>
-                      <a:tailEnd type="none" w="med" len="med"/>
-                    </a:lnB>
-                    <a:solidFill>
-                      <a:srgbClr val="FFFFFF"/>
-                    </a:solidFill>
-                  </a:tcPr>
-                </a:tc>
-                <a:tc>
-                  <a:txBody>
-                    <a:bodyPr/>
-                    <a:lstStyle/>
-                    <a:p>
-                      <a:pPr indent="0" marL="0">
-                        <a:buNone/>
-                      </a:pPr>
-                      <a:r>
-                        <a:rPr lang="en-US" sz="1500" b="1" dirty="0">
-                          <a:solidFill>
-                            <a:srgbClr val="2E9E6B"/>
-                          </a:solidFill>
-                          <a:latin typeface="Calibri" pitchFamily="34" charset="0"/>
-                          <a:ea typeface="Calibri" pitchFamily="34" charset="-122"/>
-                          <a:cs typeface="Calibri" pitchFamily="34" charset="-120"/>
-                        </a:rPr>
-                        <a:t>OK</a:t>
-                      </a:r>
-                      <a:endParaRPr lang="en-US" sz="1500" dirty="0">
-                        <a:latin typeface="Calibri" charset="0"/>
-                        <a:ea typeface="Calibri" charset="0"/>
-                        <a:cs typeface="Calibri" charset="0"/>
-                      </a:endParaRPr>
-                    </a:p>
-                  </a:txBody>
-                  <a:tcPr marL="73152" marR="73152" marT="73152" marB="73152" anchor="ctr">
-                    <a:lnL w="9525" cap="flat" cmpd="sng" algn="ctr">
-                      <a:solidFill>
-                        <a:srgbClr val="D9D6EC"/>
-                      </a:solidFill>
-                      <a:prstDash val="solid"/>
-                      <a:round/>
-                      <a:headEnd type="none" w="med" len="med"/>
-                      <a:tailEnd type="none" w="med" len="med"/>
-                    </a:lnL>
-                    <a:lnR w="9525" cap="flat" cmpd="sng" algn="ctr">
-                      <a:solidFill>
-                        <a:srgbClr val="D9D6EC"/>
-                      </a:solidFill>
-                      <a:prstDash val="solid"/>
-                      <a:round/>
-                      <a:headEnd type="none" w="med" len="med"/>
-                      <a:tailEnd type="none" w="med" len="med"/>
-                    </a:lnR>
-                    <a:lnT w="9525" cap="flat" cmpd="sng" algn="ctr">
-                      <a:solidFill>
-                        <a:srgbClr val="D9D6EC"/>
-                      </a:solidFill>
-                      <a:prstDash val="solid"/>
-                      <a:round/>
-                      <a:headEnd type="none" w="med" len="med"/>
-                      <a:tailEnd type="none" w="med" len="med"/>
-                    </a:lnT>
-                    <a:lnB w="9525" cap="flat" cmpd="sng" algn="ctr">
-                      <a:solidFill>
-                        <a:srgbClr val="D9D6EC"/>
-                      </a:solidFill>
-                      <a:prstDash val="solid"/>
-                      <a:round/>
-                      <a:headEnd type="none" w="med" len="med"/>
-                      <a:tailEnd type="none" w="med" len="med"/>
-                    </a:lnB>
-                    <a:solidFill>
-                      <a:srgbClr val="FFFFFF"/>
-                    </a:solidFill>
-                  </a:tcPr>
-                </a:tc>
-              </a:tr>
-              <a:tr h="566928">
-                <a:tc>
-                  <a:txBody>
-                    <a:bodyPr/>
-                    <a:lstStyle/>
-                    <a:p>
-                      <a:pPr indent="0" marL="0">
-                        <a:buNone/>
-                      </a:pPr>
-                      <a:r>
-                        <a:rPr lang="en-US" sz="1500" dirty="0">
-                          <a:solidFill>
-                            <a:srgbClr val="22253A"/>
-                          </a:solidFill>
-                          <a:latin typeface="Calibri" pitchFamily="34" charset="0"/>
-                          <a:ea typeface="Calibri" pitchFamily="34" charset="-122"/>
-                          <a:cs typeface="Calibri" pitchFamily="34" charset="-120"/>
-                        </a:rPr>
-                        <a:t>4</a:t>
-                      </a:r>
-                      <a:endParaRPr lang="en-US" sz="1500" dirty="0">
-                        <a:latin typeface="Calibri" charset="0"/>
-                        <a:ea typeface="Calibri" charset="0"/>
-                        <a:cs typeface="Calibri" charset="0"/>
-                      </a:endParaRPr>
-                    </a:p>
-                  </a:txBody>
-                  <a:tcPr marL="73152" marR="73152" marT="73152" marB="73152" anchor="ctr">
-                    <a:lnL w="9525" cap="flat" cmpd="sng" algn="ctr">
-                      <a:solidFill>
-                        <a:srgbClr val="D9D6EC"/>
-                      </a:solidFill>
-                      <a:prstDash val="solid"/>
-                      <a:round/>
-                      <a:headEnd type="none" w="med" len="med"/>
-                      <a:tailEnd type="none" w="med" len="med"/>
-                    </a:lnL>
-                    <a:lnR w="9525" cap="flat" cmpd="sng" algn="ctr">
-                      <a:solidFill>
-                        <a:srgbClr val="D9D6EC"/>
-                      </a:solidFill>
-                      <a:prstDash val="solid"/>
-                      <a:round/>
-                      <a:headEnd type="none" w="med" len="med"/>
-                      <a:tailEnd type="none" w="med" len="med"/>
-                    </a:lnR>
-                    <a:lnT w="9525" cap="flat" cmpd="sng" algn="ctr">
-                      <a:solidFill>
-                        <a:srgbClr val="D9D6EC"/>
-                      </a:solidFill>
-                      <a:prstDash val="solid"/>
-                      <a:round/>
-                      <a:headEnd type="none" w="med" len="med"/>
-                      <a:tailEnd type="none" w="med" len="med"/>
-                    </a:lnT>
-                    <a:lnB w="9525" cap="flat" cmpd="sng" algn="ctr">
-                      <a:solidFill>
-                        <a:srgbClr val="D9D6EC"/>
-                      </a:solidFill>
-                      <a:prstDash val="solid"/>
-                      <a:round/>
-                      <a:headEnd type="none" w="med" len="med"/>
-                      <a:tailEnd type="none" w="med" len="med"/>
-                    </a:lnB>
-                    <a:solidFill>
-                      <a:srgbClr val="F7F6FD"/>
-                    </a:solidFill>
-                  </a:tcPr>
-                </a:tc>
-                <a:tc>
-                  <a:txBody>
-                    <a:bodyPr/>
-                    <a:lstStyle/>
-                    <a:p>
-                      <a:pPr indent="0" marL="0">
-                        <a:buNone/>
-                      </a:pPr>
-                      <a:r>
-                        <a:rPr lang="en-US" sz="1500" dirty="0">
-                          <a:solidFill>
-                            <a:srgbClr val="22253A"/>
-                          </a:solidFill>
-                          <a:latin typeface="Courier New" pitchFamily="34" charset="0"/>
-                          <a:ea typeface="Courier New" pitchFamily="34" charset="-122"/>
-                          <a:cs typeface="Courier New" pitchFamily="34" charset="-120"/>
-                        </a:rPr>
-                        <a:t>aws s3 ls …/</a:t>
-                      </a:r>
-                      <a:endParaRPr lang="en-US" sz="1500" dirty="0">
-                        <a:latin typeface="Courier New" charset="0"/>
-                        <a:ea typeface="Courier New" charset="0"/>
-                        <a:cs typeface="Courier New" charset="0"/>
-                      </a:endParaRPr>
-                    </a:p>
-                  </a:txBody>
-                  <a:tcPr marL="73152" marR="73152" marT="73152" marB="73152" anchor="ctr">
-                    <a:lnL w="9525" cap="flat" cmpd="sng" algn="ctr">
-                      <a:solidFill>
-                        <a:srgbClr val="D9D6EC"/>
-                      </a:solidFill>
-                      <a:prstDash val="solid"/>
-                      <a:round/>
-                      <a:headEnd type="none" w="med" len="med"/>
-                      <a:tailEnd type="none" w="med" len="med"/>
-                    </a:lnL>
-                    <a:lnR w="9525" cap="flat" cmpd="sng" algn="ctr">
-                      <a:solidFill>
-                        <a:srgbClr val="D9D6EC"/>
-                      </a:solidFill>
-                      <a:prstDash val="solid"/>
-                      <a:round/>
-                      <a:headEnd type="none" w="med" len="med"/>
-                      <a:tailEnd type="none" w="med" len="med"/>
-                    </a:lnR>
-                    <a:lnT w="9525" cap="flat" cmpd="sng" algn="ctr">
-                      <a:solidFill>
-                        <a:srgbClr val="D9D6EC"/>
-                      </a:solidFill>
-                      <a:prstDash val="solid"/>
-                      <a:round/>
-                      <a:headEnd type="none" w="med" len="med"/>
-                      <a:tailEnd type="none" w="med" len="med"/>
-                    </a:lnT>
-                    <a:lnB w="9525" cap="flat" cmpd="sng" algn="ctr">
-                      <a:solidFill>
-                        <a:srgbClr val="D9D6EC"/>
-                      </a:solidFill>
-                      <a:prstDash val="solid"/>
-                      <a:round/>
-                      <a:headEnd type="none" w="med" len="med"/>
-                      <a:tailEnd type="none" w="med" len="med"/>
-                    </a:lnB>
-                    <a:solidFill>
-                      <a:srgbClr val="F7F6FD"/>
-                    </a:solidFill>
-                  </a:tcPr>
-                </a:tc>
-                <a:tc>
-                  <a:txBody>
-                    <a:bodyPr/>
-                    <a:lstStyle/>
-                    <a:p>
-                      <a:pPr indent="0" marL="0">
-                        <a:buNone/>
-                      </a:pPr>
-                      <a:r>
-                        <a:rPr lang="en-US" sz="1500" dirty="0">
-                          <a:solidFill>
-                            <a:srgbClr val="22253A"/>
-                          </a:solidFill>
-                          <a:latin typeface="Courier New" pitchFamily="34" charset="0"/>
-                          <a:ea typeface="Courier New" pitchFamily="34" charset="-122"/>
-                          <a:cs typeface="Courier New" pitchFamily="34" charset="-120"/>
-                        </a:rPr>
-                        <a:t>s3:ListBucket</a:t>
-                      </a:r>
-                      <a:endParaRPr lang="en-US" sz="1500" dirty="0">
-                        <a:latin typeface="Courier New" charset="0"/>
-                        <a:ea typeface="Courier New" charset="0"/>
-                        <a:cs typeface="Courier New" charset="0"/>
-                      </a:endParaRPr>
-                    </a:p>
-                  </a:txBody>
-                  <a:tcPr marL="73152" marR="73152" marT="73152" marB="73152" anchor="ctr">
-                    <a:lnL w="9525" cap="flat" cmpd="sng" algn="ctr">
-                      <a:solidFill>
-                        <a:srgbClr val="D9D6EC"/>
-                      </a:solidFill>
-                      <a:prstDash val="solid"/>
-                      <a:round/>
-                      <a:headEnd type="none" w="med" len="med"/>
-                      <a:tailEnd type="none" w="med" len="med"/>
-                    </a:lnL>
-                    <a:lnR w="9525" cap="flat" cmpd="sng" algn="ctr">
-                      <a:solidFill>
-                        <a:srgbClr val="D9D6EC"/>
-                      </a:solidFill>
-                      <a:prstDash val="solid"/>
-                      <a:round/>
-                      <a:headEnd type="none" w="med" len="med"/>
-                      <a:tailEnd type="none" w="med" len="med"/>
-                    </a:lnR>
-                    <a:lnT w="9525" cap="flat" cmpd="sng" algn="ctr">
-                      <a:solidFill>
-                        <a:srgbClr val="D9D6EC"/>
-                      </a:solidFill>
-                      <a:prstDash val="solid"/>
-                      <a:round/>
-                      <a:headEnd type="none" w="med" len="med"/>
-                      <a:tailEnd type="none" w="med" len="med"/>
-                    </a:lnT>
-                    <a:lnB w="9525" cap="flat" cmpd="sng" algn="ctr">
-                      <a:solidFill>
-                        <a:srgbClr val="D9D6EC"/>
-                      </a:solidFill>
-                      <a:prstDash val="solid"/>
-                      <a:round/>
-                      <a:headEnd type="none" w="med" len="med"/>
-                      <a:tailEnd type="none" w="med" len="med"/>
-                    </a:lnB>
-                    <a:solidFill>
-                      <a:srgbClr val="F7F6FD"/>
-                    </a:solidFill>
-                  </a:tcPr>
-                </a:tc>
-                <a:tc>
-                  <a:txBody>
-                    <a:bodyPr/>
-                    <a:lstStyle/>
-                    <a:p>
-                      <a:pPr indent="0" marL="0">
-                        <a:buNone/>
-                      </a:pPr>
-                      <a:r>
-                        <a:rPr lang="en-US" sz="1500" b="1" dirty="0">
-                          <a:solidFill>
-                            <a:srgbClr val="D64545"/>
-                          </a:solidFill>
-                          <a:latin typeface="Calibri" pitchFamily="34" charset="0"/>
-                          <a:ea typeface="Calibri" pitchFamily="34" charset="-122"/>
-                          <a:cs typeface="Calibri" pitchFamily="34" charset="-120"/>
-                        </a:rPr>
-                        <a:t>Negato: prefisso</a:t>
-                      </a:r>
-                      <a:endParaRPr lang="en-US" sz="1500" dirty="0">
-                        <a:latin typeface="Calibri" charset="0"/>
-                        <a:ea typeface="Calibri" charset="0"/>
-                        <a:cs typeface="Calibri" charset="0"/>
-                      </a:endParaRPr>
-                    </a:p>
-                  </a:txBody>
-                  <a:tcPr marL="73152" marR="73152" marT="73152" marB="73152" anchor="ctr">
-                    <a:lnL w="9525" cap="flat" cmpd="sng" algn="ctr">
-                      <a:solidFill>
-                        <a:srgbClr val="D9D6EC"/>
-                      </a:solidFill>
-                      <a:prstDash val="solid"/>
-                      <a:round/>
-                      <a:headEnd type="none" w="med" len="med"/>
-                      <a:tailEnd type="none" w="med" len="med"/>
-                    </a:lnL>
-                    <a:lnR w="9525" cap="flat" cmpd="sng" algn="ctr">
-                      <a:solidFill>
-                        <a:srgbClr val="D9D6EC"/>
-                      </a:solidFill>
-                      <a:prstDash val="solid"/>
-                      <a:round/>
-                      <a:headEnd type="none" w="med" len="med"/>
-                      <a:tailEnd type="none" w="med" len="med"/>
-                    </a:lnR>
-                    <a:lnT w="9525" cap="flat" cmpd="sng" algn="ctr">
-                      <a:solidFill>
-                        <a:srgbClr val="D9D6EC"/>
-                      </a:solidFill>
-                      <a:prstDash val="solid"/>
-                      <a:round/>
-                      <a:headEnd type="none" w="med" len="med"/>
-                      <a:tailEnd type="none" w="med" len="med"/>
-                    </a:lnT>
-                    <a:lnB w="9525" cap="flat" cmpd="sng" algn="ctr">
-                      <a:solidFill>
-                        <a:srgbClr val="D9D6EC"/>
-                      </a:solidFill>
-                      <a:prstDash val="solid"/>
-                      <a:round/>
-                      <a:headEnd type="none" w="med" len="med"/>
-                      <a:tailEnd type="none" w="med" len="med"/>
-                    </a:lnB>
-                    <a:solidFill>
-                      <a:srgbClr val="F7F6FD"/>
-                    </a:solidFill>
-                  </a:tcPr>
-                </a:tc>
-              </a:tr>
-              <a:tr h="566928">
-                <a:tc>
-                  <a:txBody>
-                    <a:bodyPr/>
-                    <a:lstStyle/>
-                    <a:p>
-                      <a:pPr indent="0" marL="0">
-                        <a:buNone/>
-                      </a:pPr>
-                      <a:r>
-                        <a:rPr lang="en-US" sz="1500" dirty="0">
-                          <a:solidFill>
-                            <a:srgbClr val="22253A"/>
-                          </a:solidFill>
-                          <a:latin typeface="Calibri" pitchFamily="34" charset="0"/>
-                          <a:ea typeface="Calibri" pitchFamily="34" charset="-122"/>
-                          <a:cs typeface="Calibri" pitchFamily="34" charset="-120"/>
-                        </a:rPr>
-                        <a:t>5</a:t>
-                      </a:r>
-                      <a:endParaRPr lang="en-US" sz="1500" dirty="0">
-                        <a:latin typeface="Calibri" charset="0"/>
-                        <a:ea typeface="Calibri" charset="0"/>
-                        <a:cs typeface="Calibri" charset="0"/>
-                      </a:endParaRPr>
-                    </a:p>
-                  </a:txBody>
-                  <a:tcPr marL="73152" marR="73152" marT="73152" marB="73152" anchor="ctr">
-                    <a:lnL w="9525" cap="flat" cmpd="sng" algn="ctr">
-                      <a:solidFill>
-                        <a:srgbClr val="D9D6EC"/>
-                      </a:solidFill>
-                      <a:prstDash val="solid"/>
-                      <a:round/>
-                      <a:headEnd type="none" w="med" len="med"/>
-                      <a:tailEnd type="none" w="med" len="med"/>
-                    </a:lnL>
-                    <a:lnR w="9525" cap="flat" cmpd="sng" algn="ctr">
-                      <a:solidFill>
-                        <a:srgbClr val="D9D6EC"/>
-                      </a:solidFill>
-                      <a:prstDash val="solid"/>
-                      <a:round/>
-                      <a:headEnd type="none" w="med" len="med"/>
-                      <a:tailEnd type="none" w="med" len="med"/>
-                    </a:lnR>
-                    <a:lnT w="9525" cap="flat" cmpd="sng" algn="ctr">
-                      <a:solidFill>
-                        <a:srgbClr val="D9D6EC"/>
-                      </a:solidFill>
-                      <a:prstDash val="solid"/>
-                      <a:round/>
-                      <a:headEnd type="none" w="med" len="med"/>
-                      <a:tailEnd type="none" w="med" len="med"/>
-                    </a:lnT>
-                    <a:lnB w="9525" cap="flat" cmpd="sng" algn="ctr">
-                      <a:solidFill>
-                        <a:srgbClr val="D9D6EC"/>
-                      </a:solidFill>
-                      <a:prstDash val="solid"/>
-                      <a:round/>
-                      <a:headEnd type="none" w="med" len="med"/>
-                      <a:tailEnd type="none" w="med" len="med"/>
-                    </a:lnB>
-                    <a:solidFill>
-                      <a:srgbClr val="FFFFFF"/>
-                    </a:solidFill>
-                  </a:tcPr>
-                </a:tc>
-                <a:tc>
-                  <a:txBody>
-                    <a:bodyPr/>
-                    <a:lstStyle/>
-                    <a:p>
-                      <a:pPr indent="0" marL="0">
-                        <a:buNone/>
-                      </a:pPr>
-                      <a:r>
-                        <a:rPr lang="en-US" sz="1500" dirty="0">
-                          <a:solidFill>
-                            <a:srgbClr val="22253A"/>
-                          </a:solidFill>
-                          <a:latin typeface="Courier New" pitchFamily="34" charset="0"/>
-                          <a:ea typeface="Courier New" pitchFamily="34" charset="-122"/>
-                          <a:cs typeface="Courier New" pitchFamily="34" charset="-120"/>
-                        </a:rPr>
-                        <a:t>aws s3 cp test.txt …</a:t>
-                      </a:r>
-                      <a:endParaRPr lang="en-US" sz="1500" dirty="0">
-                        <a:latin typeface="Courier New" charset="0"/>
-                        <a:ea typeface="Courier New" charset="0"/>
-                        <a:cs typeface="Courier New" charset="0"/>
-                      </a:endParaRPr>
-                    </a:p>
-                  </a:txBody>
-                  <a:tcPr marL="73152" marR="73152" marT="73152" marB="73152" anchor="ctr">
-                    <a:lnL w="9525" cap="flat" cmpd="sng" algn="ctr">
-                      <a:solidFill>
-                        <a:srgbClr val="D9D6EC"/>
-                      </a:solidFill>
-                      <a:prstDash val="solid"/>
-                      <a:round/>
-                      <a:headEnd type="none" w="med" len="med"/>
-                      <a:tailEnd type="none" w="med" len="med"/>
-                    </a:lnL>
-                    <a:lnR w="9525" cap="flat" cmpd="sng" algn="ctr">
-                      <a:solidFill>
-                        <a:srgbClr val="D9D6EC"/>
-                      </a:solidFill>
-                      <a:prstDash val="solid"/>
-                      <a:round/>
-                      <a:headEnd type="none" w="med" len="med"/>
-                      <a:tailEnd type="none" w="med" len="med"/>
-                    </a:lnR>
-                    <a:lnT w="9525" cap="flat" cmpd="sng" algn="ctr">
-                      <a:solidFill>
-                        <a:srgbClr val="D9D6EC"/>
-                      </a:solidFill>
-                      <a:prstDash val="solid"/>
-                      <a:round/>
-                      <a:headEnd type="none" w="med" len="med"/>
-                      <a:tailEnd type="none" w="med" len="med"/>
-                    </a:lnT>
-                    <a:lnB w="9525" cap="flat" cmpd="sng" algn="ctr">
-                      <a:solidFill>
-                        <a:srgbClr val="D9D6EC"/>
-                      </a:solidFill>
-                      <a:prstDash val="solid"/>
-                      <a:round/>
-                      <a:headEnd type="none" w="med" len="med"/>
-                      <a:tailEnd type="none" w="med" len="med"/>
-                    </a:lnB>
-                    <a:solidFill>
-                      <a:srgbClr val="FFFFFF"/>
-                    </a:solidFill>
-                  </a:tcPr>
-                </a:tc>
-                <a:tc>
-                  <a:txBody>
-                    <a:bodyPr/>
-                    <a:lstStyle/>
-                    <a:p>
-                      <a:pPr indent="0" marL="0">
-                        <a:buNone/>
-                      </a:pPr>
-                      <a:r>
-                        <a:rPr lang="en-US" sz="1500" dirty="0">
-                          <a:solidFill>
-                            <a:srgbClr val="22253A"/>
-                          </a:solidFill>
-                          <a:latin typeface="Courier New" pitchFamily="34" charset="0"/>
-                          <a:ea typeface="Courier New" pitchFamily="34" charset="-122"/>
-                          <a:cs typeface="Courier New" pitchFamily="34" charset="-120"/>
-                        </a:rPr>
-                        <a:t>s3:PutObject</a:t>
-                      </a:r>
-                      <a:endParaRPr lang="en-US" sz="1500" dirty="0">
-                        <a:latin typeface="Courier New" charset="0"/>
-                        <a:ea typeface="Courier New" charset="0"/>
-                        <a:cs typeface="Courier New" charset="0"/>
-                      </a:endParaRPr>
-                    </a:p>
-                  </a:txBody>
-                  <a:tcPr marL="73152" marR="73152" marT="73152" marB="73152" anchor="ctr">
-                    <a:lnL w="9525" cap="flat" cmpd="sng" algn="ctr">
-                      <a:solidFill>
-                        <a:srgbClr val="D9D6EC"/>
-                      </a:solidFill>
-                      <a:prstDash val="solid"/>
-                      <a:round/>
-                      <a:headEnd type="none" w="med" len="med"/>
-                      <a:tailEnd type="none" w="med" len="med"/>
-                    </a:lnL>
-                    <a:lnR w="9525" cap="flat" cmpd="sng" algn="ctr">
-                      <a:solidFill>
-                        <a:srgbClr val="D9D6EC"/>
-                      </a:solidFill>
-                      <a:prstDash val="solid"/>
-                      <a:round/>
-                      <a:headEnd type="none" w="med" len="med"/>
-                      <a:tailEnd type="none" w="med" len="med"/>
-                    </a:lnR>
-                    <a:lnT w="9525" cap="flat" cmpd="sng" algn="ctr">
-                      <a:solidFill>
-                        <a:srgbClr val="D9D6EC"/>
-                      </a:solidFill>
-                      <a:prstDash val="solid"/>
-                      <a:round/>
-                      <a:headEnd type="none" w="med" len="med"/>
-                      <a:tailEnd type="none" w="med" len="med"/>
-                    </a:lnT>
-                    <a:lnB w="9525" cap="flat" cmpd="sng" algn="ctr">
-                      <a:solidFill>
-                        <a:srgbClr val="D9D6EC"/>
-                      </a:solidFill>
-                      <a:prstDash val="solid"/>
-                      <a:round/>
-                      <a:headEnd type="none" w="med" len="med"/>
-                      <a:tailEnd type="none" w="med" len="med"/>
-                    </a:lnB>
-                    <a:solidFill>
-                      <a:srgbClr val="FFFFFF"/>
-                    </a:solidFill>
-                  </a:tcPr>
-                </a:tc>
-                <a:tc>
-                  <a:txBody>
-                    <a:bodyPr/>
-                    <a:lstStyle/>
-                    <a:p>
-                      <a:pPr indent="0" marL="0">
-                        <a:buNone/>
-                      </a:pPr>
-                      <a:r>
-                        <a:rPr lang="en-US" sz="1500" b="1" dirty="0">
-                          <a:solidFill>
-                            <a:srgbClr val="D64545"/>
-                          </a:solidFill>
-                          <a:latin typeface="Calibri" pitchFamily="34" charset="0"/>
-                          <a:ea typeface="Calibri" pitchFamily="34" charset="-122"/>
-                          <a:cs typeface="Calibri" pitchFamily="34" charset="-120"/>
-                        </a:rPr>
-                        <a:t>Negato: implicito</a:t>
-                      </a:r>
-                      <a:endParaRPr lang="en-US" sz="1500" dirty="0">
-                        <a:latin typeface="Calibri" charset="0"/>
-                        <a:ea typeface="Calibri" charset="0"/>
-                        <a:cs typeface="Calibri" charset="0"/>
-                      </a:endParaRPr>
-                    </a:p>
-                  </a:txBody>
-                  <a:tcPr marL="73152" marR="73152" marT="73152" marB="73152" anchor="ctr">
-                    <a:lnL w="9525" cap="flat" cmpd="sng" algn="ctr">
-                      <a:solidFill>
-                        <a:srgbClr val="D9D6EC"/>
-                      </a:solidFill>
-                      <a:prstDash val="solid"/>
-                      <a:round/>
-                      <a:headEnd type="none" w="med" len="med"/>
-                      <a:tailEnd type="none" w="med" len="med"/>
-                    </a:lnL>
-                    <a:lnR w="9525" cap="flat" cmpd="sng" algn="ctr">
-                      <a:solidFill>
-                        <a:srgbClr val="D9D6EC"/>
-                      </a:solidFill>
-                      <a:prstDash val="solid"/>
-                      <a:round/>
-                      <a:headEnd type="none" w="med" len="med"/>
-                      <a:tailEnd type="none" w="med" len="med"/>
-                    </a:lnR>
-                    <a:lnT w="9525" cap="flat" cmpd="sng" algn="ctr">
-                      <a:solidFill>
-                        <a:srgbClr val="D9D6EC"/>
-                      </a:solidFill>
-                      <a:prstDash val="solid"/>
-                      <a:round/>
-                      <a:headEnd type="none" w="med" len="med"/>
-                      <a:tailEnd type="none" w="med" len="med"/>
-                    </a:lnT>
-                    <a:lnB w="9525" cap="flat" cmpd="sng" algn="ctr">
-                      <a:solidFill>
-                        <a:srgbClr val="D9D6EC"/>
-                      </a:solidFill>
-                      <a:prstDash val="solid"/>
-                      <a:round/>
-                      <a:headEnd type="none" w="med" len="med"/>
-                      <a:tailEnd type="none" w="med" len="med"/>
-                    </a:lnB>
-                    <a:solidFill>
-                      <a:srgbClr val="FFFFFF"/>
-                    </a:solidFill>
-                  </a:tcPr>
-                </a:tc>
-              </a:tr>
-              <a:tr h="566928">
-                <a:tc>
-                  <a:txBody>
-                    <a:bodyPr/>
-                    <a:lstStyle/>
-                    <a:p>
-                      <a:pPr indent="0" marL="0">
-                        <a:buNone/>
-                      </a:pPr>
-                      <a:r>
-                        <a:rPr lang="en-US" sz="1500" dirty="0">
-                          <a:solidFill>
-                            <a:srgbClr val="22253A"/>
-                          </a:solidFill>
-                          <a:latin typeface="Calibri" pitchFamily="34" charset="0"/>
-                          <a:ea typeface="Calibri" pitchFamily="34" charset="-122"/>
-                          <a:cs typeface="Calibri" pitchFamily="34" charset="-120"/>
-                        </a:rPr>
-                        <a:t>6</a:t>
-                      </a:r>
-                      <a:endParaRPr lang="en-US" sz="1500" dirty="0">
-                        <a:latin typeface="Calibri" charset="0"/>
-                        <a:ea typeface="Calibri" charset="0"/>
-                        <a:cs typeface="Calibri" charset="0"/>
-                      </a:endParaRPr>
-                    </a:p>
-                  </a:txBody>
-                  <a:tcPr marL="73152" marR="73152" marT="73152" marB="73152" anchor="ctr">
-                    <a:lnL w="9525" cap="flat" cmpd="sng" algn="ctr">
-                      <a:solidFill>
-                        <a:srgbClr val="D9D6EC"/>
-                      </a:solidFill>
-                      <a:prstDash val="solid"/>
-                      <a:round/>
-                      <a:headEnd type="none" w="med" len="med"/>
-                      <a:tailEnd type="none" w="med" len="med"/>
-                    </a:lnL>
-                    <a:lnR w="9525" cap="flat" cmpd="sng" algn="ctr">
-                      <a:solidFill>
-                        <a:srgbClr val="D9D6EC"/>
-                      </a:solidFill>
-                      <a:prstDash val="solid"/>
-                      <a:round/>
-                      <a:headEnd type="none" w="med" len="med"/>
-                      <a:tailEnd type="none" w="med" len="med"/>
-                    </a:lnR>
-                    <a:lnT w="9525" cap="flat" cmpd="sng" algn="ctr">
-                      <a:solidFill>
-                        <a:srgbClr val="D9D6EC"/>
-                      </a:solidFill>
-                      <a:prstDash val="solid"/>
-                      <a:round/>
-                      <a:headEnd type="none" w="med" len="med"/>
-                      <a:tailEnd type="none" w="med" len="med"/>
-                    </a:lnT>
-                    <a:lnB w="9525" cap="flat" cmpd="sng" algn="ctr">
-                      <a:solidFill>
-                        <a:srgbClr val="D9D6EC"/>
-                      </a:solidFill>
-                      <a:prstDash val="solid"/>
-                      <a:round/>
-                      <a:headEnd type="none" w="med" len="med"/>
-                      <a:tailEnd type="none" w="med" len="med"/>
-                    </a:lnB>
-                    <a:solidFill>
-                      <a:srgbClr val="F7F6FD"/>
-                    </a:solidFill>
-                  </a:tcPr>
-                </a:tc>
-                <a:tc>
-                  <a:txBody>
-                    <a:bodyPr/>
-                    <a:lstStyle/>
-                    <a:p>
-                      <a:pPr indent="0" marL="0">
-                        <a:buNone/>
-                      </a:pPr>
-                      <a:r>
-                        <a:rPr lang="en-US" sz="1500" dirty="0">
-                          <a:solidFill>
-                            <a:srgbClr val="22253A"/>
-                          </a:solidFill>
-                          <a:latin typeface="Courier New" pitchFamily="34" charset="0"/>
-                          <a:ea typeface="Courier New" pitchFamily="34" charset="-122"/>
-                          <a:cs typeface="Courier New" pitchFamily="34" charset="-120"/>
-                        </a:rPr>
-                        <a:t>aws s3 rm …/app-v1.0.txt</a:t>
-                      </a:r>
-                      <a:endParaRPr lang="en-US" sz="1500" dirty="0">
-                        <a:latin typeface="Courier New" charset="0"/>
-                        <a:ea typeface="Courier New" charset="0"/>
-                        <a:cs typeface="Courier New" charset="0"/>
-                      </a:endParaRPr>
-                    </a:p>
-                  </a:txBody>
-                  <a:tcPr marL="73152" marR="73152" marT="73152" marB="73152" anchor="ctr">
-                    <a:lnL w="9525" cap="flat" cmpd="sng" algn="ctr">
-                      <a:solidFill>
-                        <a:srgbClr val="D9D6EC"/>
-                      </a:solidFill>
-                      <a:prstDash val="solid"/>
-                      <a:round/>
-                      <a:headEnd type="none" w="med" len="med"/>
-                      <a:tailEnd type="none" w="med" len="med"/>
-                    </a:lnL>
-                    <a:lnR w="9525" cap="flat" cmpd="sng" algn="ctr">
-                      <a:solidFill>
-                        <a:srgbClr val="D9D6EC"/>
-                      </a:solidFill>
-                      <a:prstDash val="solid"/>
-                      <a:round/>
-                      <a:headEnd type="none" w="med" len="med"/>
-                      <a:tailEnd type="none" w="med" len="med"/>
-                    </a:lnR>
-                    <a:lnT w="9525" cap="flat" cmpd="sng" algn="ctr">
-                      <a:solidFill>
-                        <a:srgbClr val="D9D6EC"/>
-                      </a:solidFill>
-                      <a:prstDash val="solid"/>
-                      <a:round/>
-                      <a:headEnd type="none" w="med" len="med"/>
-                      <a:tailEnd type="none" w="med" len="med"/>
-                    </a:lnT>
-                    <a:lnB w="9525" cap="flat" cmpd="sng" algn="ctr">
-                      <a:solidFill>
-                        <a:srgbClr val="D9D6EC"/>
-                      </a:solidFill>
-                      <a:prstDash val="solid"/>
-                      <a:round/>
-                      <a:headEnd type="none" w="med" len="med"/>
-                      <a:tailEnd type="none" w="med" len="med"/>
-                    </a:lnB>
-                    <a:solidFill>
-                      <a:srgbClr val="F7F6FD"/>
-                    </a:solidFill>
-                  </a:tcPr>
-                </a:tc>
-                <a:tc>
-                  <a:txBody>
-                    <a:bodyPr/>
-                    <a:lstStyle/>
-                    <a:p>
-                      <a:pPr indent="0" marL="0">
-                        <a:buNone/>
-                      </a:pPr>
-                      <a:r>
-                        <a:rPr lang="en-US" sz="1500" dirty="0">
-                          <a:solidFill>
-                            <a:srgbClr val="22253A"/>
-                          </a:solidFill>
-                          <a:latin typeface="Courier New" pitchFamily="34" charset="0"/>
-                          <a:ea typeface="Courier New" pitchFamily="34" charset="-122"/>
-                          <a:cs typeface="Courier New" pitchFamily="34" charset="-120"/>
-                        </a:rPr>
-                        <a:t>s3:DeleteObject</a:t>
-                      </a:r>
-                      <a:endParaRPr lang="en-US" sz="1500" dirty="0">
-                        <a:latin typeface="Courier New" charset="0"/>
-                        <a:ea typeface="Courier New" charset="0"/>
-                        <a:cs typeface="Courier New" charset="0"/>
-                      </a:endParaRPr>
-                    </a:p>
-                  </a:txBody>
-                  <a:tcPr marL="73152" marR="73152" marT="73152" marB="73152" anchor="ctr">
-                    <a:lnL w="9525" cap="flat" cmpd="sng" algn="ctr">
-                      <a:solidFill>
-                        <a:srgbClr val="D9D6EC"/>
-                      </a:solidFill>
-                      <a:prstDash val="solid"/>
-                      <a:round/>
-                      <a:headEnd type="none" w="med" len="med"/>
-                      <a:tailEnd type="none" w="med" len="med"/>
-                    </a:lnL>
-                    <a:lnR w="9525" cap="flat" cmpd="sng" algn="ctr">
-                      <a:solidFill>
-                        <a:srgbClr val="D9D6EC"/>
-                      </a:solidFill>
-                      <a:prstDash val="solid"/>
-                      <a:round/>
-                      <a:headEnd type="none" w="med" len="med"/>
-                      <a:tailEnd type="none" w="med" len="med"/>
-                    </a:lnR>
-                    <a:lnT w="9525" cap="flat" cmpd="sng" algn="ctr">
-                      <a:solidFill>
-                        <a:srgbClr val="D9D6EC"/>
-                      </a:solidFill>
-                      <a:prstDash val="solid"/>
-                      <a:round/>
-                      <a:headEnd type="none" w="med" len="med"/>
-                      <a:tailEnd type="none" w="med" len="med"/>
-                    </a:lnT>
-                    <a:lnB w="9525" cap="flat" cmpd="sng" algn="ctr">
-                      <a:solidFill>
-                        <a:srgbClr val="D9D6EC"/>
-                      </a:solidFill>
-                      <a:prstDash val="solid"/>
-                      <a:round/>
-                      <a:headEnd type="none" w="med" len="med"/>
-                      <a:tailEnd type="none" w="med" len="med"/>
-                    </a:lnB>
-                    <a:solidFill>
-                      <a:srgbClr val="F7F6FD"/>
-                    </a:solidFill>
-                  </a:tcPr>
-                </a:tc>
-                <a:tc>
-                  <a:txBody>
-                    <a:bodyPr/>
-                    <a:lstStyle/>
-                    <a:p>
-                      <a:pPr indent="0" marL="0">
-                        <a:buNone/>
-                      </a:pPr>
-                      <a:r>
-                        <a:rPr lang="en-US" sz="1500" b="1" dirty="0">
-                          <a:solidFill>
-                            <a:srgbClr val="D64545"/>
-                          </a:solidFill>
-                          <a:latin typeface="Calibri" pitchFamily="34" charset="0"/>
-                          <a:ea typeface="Calibri" pitchFamily="34" charset="-122"/>
-                          <a:cs typeface="Calibri" pitchFamily="34" charset="-120"/>
-                        </a:rPr>
-                        <a:t>Negato: esplicito</a:t>
-                      </a:r>
-                      <a:endParaRPr lang="en-US" sz="1500" dirty="0">
-                        <a:latin typeface="Calibri" charset="0"/>
-                        <a:ea typeface="Calibri" charset="0"/>
-                        <a:cs typeface="Calibri" charset="0"/>
-                      </a:endParaRPr>
-                    </a:p>
-                  </a:txBody>
-                  <a:tcPr marL="73152" marR="73152" marT="73152" marB="73152" anchor="ctr">
-                    <a:lnL w="9525" cap="flat" cmpd="sng" algn="ctr">
-                      <a:solidFill>
-                        <a:srgbClr val="D9D6EC"/>
-                      </a:solidFill>
-                      <a:prstDash val="solid"/>
-                      <a:round/>
-                      <a:headEnd type="none" w="med" len="med"/>
-                      <a:tailEnd type="none" w="med" len="med"/>
-                    </a:lnL>
-                    <a:lnR w="9525" cap="flat" cmpd="sng" algn="ctr">
-                      <a:solidFill>
-                        <a:srgbClr val="D9D6EC"/>
-                      </a:solidFill>
-                      <a:prstDash val="solid"/>
-                      <a:round/>
-                      <a:headEnd type="none" w="med" len="med"/>
-                      <a:tailEnd type="none" w="med" len="med"/>
-                    </a:lnR>
-                    <a:lnT w="9525" cap="flat" cmpd="sng" algn="ctr">
-                      <a:solidFill>
-                        <a:srgbClr val="D9D6EC"/>
-                      </a:solidFill>
-                      <a:prstDash val="solid"/>
-                      <a:round/>
-                      <a:headEnd type="none" w="med" len="med"/>
-                      <a:tailEnd type="none" w="med" len="med"/>
-                    </a:lnT>
-                    <a:lnB w="9525" cap="flat" cmpd="sng" algn="ctr">
-                      <a:solidFill>
-                        <a:srgbClr val="D9D6EC"/>
-                      </a:solidFill>
-                      <a:prstDash val="solid"/>
-                      <a:round/>
-                      <a:headEnd type="none" w="med" len="med"/>
-                      <a:tailEnd type="none" w="med" len="med"/>
-                    </a:lnB>
-                    <a:solidFill>
-                      <a:srgbClr val="F7F6FD"/>
-                    </a:solidFill>
-                  </a:tcPr>
-                </a:tc>
-              </a:tr>
-            </a:tbl>
-          </a:graphicData>
-        </a:graphic>
-      </p:graphicFrame>
-      <p:sp>
-        <p:nvSpPr>
-          <p:cNvPr id="6" name="Text 2"/>
+      <p:sp>
+        <p:nvSpPr>
+          <p:cNvPr id="5" name="Shape 2"/>
+          <p:cNvSpPr/>
+          <p:nvPr/>
+        </p:nvSpPr>
+        <p:spPr>
+          <a:xfrm>
+            <a:off x="548640" y="1417320"/>
+            <a:ext cx="5440680" cy="1234440"/>
+          </a:xfrm>
+          <a:prstGeom prst="roundRect">
+            <a:avLst>
+              <a:gd name="adj" fmla="val 7407"/>
+            </a:avLst>
+          </a:prstGeom>
+          <a:solidFill>
+            <a:srgbClr val="F7F6FD"/>
+          </a:solidFill>
+          <a:ln w="12700">
+            <a:solidFill>
+              <a:srgbClr val="D9D6EC"/>
+            </a:solidFill>
+            <a:prstDash val="solid"/>
+          </a:ln>
+        </p:spPr>
+      </p:sp>
+      <p:sp>
+        <p:nvSpPr>
+          <p:cNvPr id="6" name="Shape 3"/>
+          <p:cNvSpPr/>
+          <p:nvPr/>
+        </p:nvSpPr>
+        <p:spPr>
+          <a:xfrm>
+            <a:off x="777240" y="1719072"/>
+            <a:ext cx="640080" cy="640080"/>
+          </a:xfrm>
+          <a:prstGeom prst="ellipse">
+            <a:avLst/>
+          </a:prstGeom>
+          <a:solidFill>
+            <a:srgbClr val="5B3FD0"/>
+          </a:solidFill>
+          <a:ln w="12700">
+            <a:solidFill>
+              <a:srgbClr val="5B3FD0"/>
+            </a:solidFill>
+            <a:prstDash val="solid"/>
+          </a:ln>
+        </p:spPr>
+      </p:sp>
+      <p:sp>
+        <p:nvSpPr>
+          <p:cNvPr id="7" name="Text 4"/>
+          <p:cNvSpPr txBox="1"/>
+          <p:nvPr/>
+        </p:nvSpPr>
+        <p:spPr>
+          <a:xfrm>
+            <a:off x="777240" y="1719072"/>
+            <a:ext cx="640080" cy="640080"/>
+          </a:xfrm>
+          <a:prstGeom prst="rect">
+            <a:avLst/>
+          </a:prstGeom>
+          <a:noFill/>
+          <a:ln/>
+        </p:spPr>
+        <p:txBody>
+          <a:bodyPr wrap="square" lIns="0" tIns="0" rIns="0" bIns="0" rtlCol="0" anchor="ctr"/>
+          <a:lstStyle/>
+          <a:p>
+            <a:pPr algn="ctr" indent="0" marL="0">
+              <a:buNone/>
+            </a:pPr>
+            <a:r>
+              <a:rPr lang="en-US" sz="2000" b="1" dirty="0">
+                <a:solidFill>
+                  <a:srgbClr val="FFFFFF"/>
+                </a:solidFill>
+                <a:latin typeface="Calibri" pitchFamily="34" charset="0"/>
+                <a:ea typeface="Calibri" pitchFamily="34" charset="-122"/>
+                <a:cs typeface="Calibri" pitchFamily="34" charset="-120"/>
+              </a:rPr>
+              <a:t>1</a:t>
+            </a:r>
+            <a:endParaRPr lang="en-US" sz="2000" dirty="0"/>
+          </a:p>
+        </p:txBody>
+      </p:sp>
+      <p:sp>
+        <p:nvSpPr>
+          <p:cNvPr id="8" name="Text 5"/>
+          <p:cNvSpPr txBox="1"/>
+          <p:nvPr/>
+        </p:nvSpPr>
+        <p:spPr>
+          <a:xfrm>
+            <a:off x="1600200" y="1417320"/>
+            <a:ext cx="2697480" cy="1234440"/>
+          </a:xfrm>
+          <a:prstGeom prst="rect">
+            <a:avLst/>
+          </a:prstGeom>
+          <a:noFill/>
+          <a:ln/>
+        </p:spPr>
+        <p:txBody>
+          <a:bodyPr wrap="square" lIns="0" tIns="0" rIns="0" bIns="0" rtlCol="0" anchor="ctr"/>
+          <a:lstStyle/>
+          <a:p>
+            <a:pPr indent="0" marL="0">
+              <a:buNone/>
+            </a:pPr>
+            <a:r>
+              <a:rPr lang="en-US" sz="1800" b="1" dirty="0">
+                <a:solidFill>
+                  <a:srgbClr val="22253A"/>
+                </a:solidFill>
+                <a:latin typeface="Calibri" pitchFamily="34" charset="0"/>
+                <a:ea typeface="Calibri" pitchFamily="34" charset="-122"/>
+                <a:cs typeface="Calibri" pitchFamily="34" charset="-120"/>
+              </a:rPr>
+              <a:t>Chi sono?</a:t>
+            </a:r>
+            <a:endParaRPr lang="en-US" sz="1800" dirty="0"/>
+          </a:p>
+          <a:p>
+            <a:pPr indent="0" marL="0">
+              <a:buNone/>
+            </a:pPr>
+            <a:r>
+              <a:rPr lang="en-US" sz="1500" dirty="0">
+                <a:solidFill>
+                  <a:srgbClr val="5F6478"/>
+                </a:solidFill>
+                <a:latin typeface="Courier New" pitchFamily="34" charset="0"/>
+                <a:ea typeface="Courier New" pitchFamily="34" charset="-122"/>
+                <a:cs typeface="Courier New" pitchFamily="34" charset="-120"/>
+              </a:rPr>
+              <a:t>sts get-caller-identity</a:t>
+            </a:r>
+            <a:endParaRPr lang="en-US" sz="1800" dirty="0"/>
+          </a:p>
+        </p:txBody>
+      </p:sp>
+      <p:sp>
+        <p:nvSpPr>
+          <p:cNvPr id="9" name="Text 6"/>
+          <p:cNvSpPr txBox="1"/>
+          <p:nvPr/>
+        </p:nvSpPr>
+        <p:spPr>
+          <a:xfrm>
+            <a:off x="4297680" y="1417320"/>
+            <a:ext cx="1554480" cy="1234440"/>
+          </a:xfrm>
+          <a:prstGeom prst="rect">
+            <a:avLst/>
+          </a:prstGeom>
+          <a:noFill/>
+          <a:ln/>
+        </p:spPr>
+        <p:txBody>
+          <a:bodyPr wrap="square" lIns="0" tIns="0" rIns="0" bIns="0" rtlCol="0" anchor="ctr"/>
+          <a:lstStyle/>
+          <a:p>
+            <a:pPr algn="ctr" indent="0" marL="0">
+              <a:buNone/>
+            </a:pPr>
+            <a:r>
+              <a:rPr lang="en-US" sz="1600" b="1" dirty="0">
+                <a:solidFill>
+                  <a:srgbClr val="5B3FD0"/>
+                </a:solidFill>
+                <a:latin typeface="Calibri" pitchFamily="34" charset="0"/>
+                <a:ea typeface="Calibri" pitchFamily="34" charset="-122"/>
+                <a:cs typeface="Calibri" pitchFamily="34" charset="-120"/>
+              </a:rPr>
+              <a:t>il role assunto</a:t>
+            </a:r>
+            <a:endParaRPr lang="en-US" sz="1600" dirty="0"/>
+          </a:p>
+        </p:txBody>
+      </p:sp>
+      <p:sp>
+        <p:nvSpPr>
+          <p:cNvPr id="10" name="Shape 7"/>
+          <p:cNvSpPr/>
+          <p:nvPr/>
+        </p:nvSpPr>
+        <p:spPr>
+          <a:xfrm>
+            <a:off x="548640" y="2834640"/>
+            <a:ext cx="5440680" cy="1234440"/>
+          </a:xfrm>
+          <a:prstGeom prst="roundRect">
+            <a:avLst>
+              <a:gd name="adj" fmla="val 7407"/>
+            </a:avLst>
+          </a:prstGeom>
+          <a:solidFill>
+            <a:srgbClr val="F7F6FD"/>
+          </a:solidFill>
+          <a:ln w="12700">
+            <a:solidFill>
+              <a:srgbClr val="D9D6EC"/>
+            </a:solidFill>
+            <a:prstDash val="solid"/>
+          </a:ln>
+        </p:spPr>
+      </p:sp>
+      <p:sp>
+        <p:nvSpPr>
+          <p:cNvPr id="11" name="Shape 8"/>
+          <p:cNvSpPr/>
+          <p:nvPr/>
+        </p:nvSpPr>
+        <p:spPr>
+          <a:xfrm>
+            <a:off x="777240" y="3136392"/>
+            <a:ext cx="640080" cy="640080"/>
+          </a:xfrm>
+          <a:prstGeom prst="ellipse">
+            <a:avLst/>
+          </a:prstGeom>
+          <a:solidFill>
+            <a:srgbClr val="5B3FD0"/>
+          </a:solidFill>
+          <a:ln w="12700">
+            <a:solidFill>
+              <a:srgbClr val="5B3FD0"/>
+            </a:solidFill>
+            <a:prstDash val="solid"/>
+          </a:ln>
+        </p:spPr>
+      </p:sp>
+      <p:sp>
+        <p:nvSpPr>
+          <p:cNvPr id="12" name="Text 9"/>
+          <p:cNvSpPr txBox="1"/>
+          <p:nvPr/>
+        </p:nvSpPr>
+        <p:spPr>
+          <a:xfrm>
+            <a:off x="777240" y="3136392"/>
+            <a:ext cx="640080" cy="640080"/>
+          </a:xfrm>
+          <a:prstGeom prst="rect">
+            <a:avLst/>
+          </a:prstGeom>
+          <a:noFill/>
+          <a:ln/>
+        </p:spPr>
+        <p:txBody>
+          <a:bodyPr wrap="square" lIns="0" tIns="0" rIns="0" bIns="0" rtlCol="0" anchor="ctr"/>
+          <a:lstStyle/>
+          <a:p>
+            <a:pPr algn="ctr" indent="0" marL="0">
+              <a:buNone/>
+            </a:pPr>
+            <a:r>
+              <a:rPr lang="en-US" sz="2000" b="1" dirty="0">
+                <a:solidFill>
+                  <a:srgbClr val="FFFFFF"/>
+                </a:solidFill>
+                <a:latin typeface="Calibri" pitchFamily="34" charset="0"/>
+                <a:ea typeface="Calibri" pitchFamily="34" charset="-122"/>
+                <a:cs typeface="Calibri" pitchFamily="34" charset="-120"/>
+              </a:rPr>
+              <a:t>2</a:t>
+            </a:r>
+            <a:endParaRPr lang="en-US" sz="2000" dirty="0"/>
+          </a:p>
+        </p:txBody>
+      </p:sp>
+      <p:sp>
+        <p:nvSpPr>
+          <p:cNvPr id="13" name="Text 10"/>
+          <p:cNvSpPr txBox="1"/>
+          <p:nvPr/>
+        </p:nvSpPr>
+        <p:spPr>
+          <a:xfrm>
+            <a:off x="1600200" y="2834640"/>
+            <a:ext cx="2697480" cy="1234440"/>
+          </a:xfrm>
+          <a:prstGeom prst="rect">
+            <a:avLst/>
+          </a:prstGeom>
+          <a:noFill/>
+          <a:ln/>
+        </p:spPr>
+        <p:txBody>
+          <a:bodyPr wrap="square" lIns="0" tIns="0" rIns="0" bIns="0" rtlCol="0" anchor="ctr"/>
+          <a:lstStyle/>
+          <a:p>
+            <a:pPr indent="0" marL="0">
+              <a:buNone/>
+            </a:pPr>
+            <a:r>
+              <a:rPr lang="en-US" sz="1800" b="1" dirty="0">
+                <a:solidFill>
+                  <a:srgbClr val="22253A"/>
+                </a:solidFill>
+                <a:latin typeface="Calibri" pitchFamily="34" charset="0"/>
+                <a:ea typeface="Calibri" pitchFamily="34" charset="-122"/>
+                <a:cs typeface="Calibri" pitchFamily="34" charset="-120"/>
+              </a:rPr>
+              <a:t>Leggi il file in releases/</a:t>
+            </a:r>
+            <a:endParaRPr lang="en-US" sz="1800" dirty="0"/>
+          </a:p>
+          <a:p>
+            <a:pPr indent="0" marL="0">
+              <a:buNone/>
+            </a:pPr>
+            <a:r>
+              <a:rPr lang="en-US" sz="1500" dirty="0">
+                <a:solidFill>
+                  <a:srgbClr val="5F6478"/>
+                </a:solidFill>
+                <a:latin typeface="Courier New" pitchFamily="34" charset="0"/>
+                <a:ea typeface="Courier New" pitchFamily="34" charset="-122"/>
+                <a:cs typeface="Courier New" pitchFamily="34" charset="-120"/>
+              </a:rPr>
+              <a:t>s3:GetObject</a:t>
+            </a:r>
+            <a:endParaRPr lang="en-US" sz="1800" dirty="0"/>
+          </a:p>
+        </p:txBody>
+      </p:sp>
+      <p:sp>
+        <p:nvSpPr>
+          <p:cNvPr id="14" name="Text 11"/>
+          <p:cNvSpPr txBox="1"/>
+          <p:nvPr/>
+        </p:nvSpPr>
+        <p:spPr>
+          <a:xfrm>
+            <a:off x="4297680" y="2834640"/>
+            <a:ext cx="1554480" cy="1234440"/>
+          </a:xfrm>
+          <a:prstGeom prst="rect">
+            <a:avLst/>
+          </a:prstGeom>
+          <a:noFill/>
+          <a:ln/>
+        </p:spPr>
+        <p:txBody>
+          <a:bodyPr wrap="square" lIns="0" tIns="0" rIns="0" bIns="0" rtlCol="0" anchor="ctr"/>
+          <a:lstStyle/>
+          <a:p>
+            <a:pPr algn="ctr" indent="0" marL="0">
+              <a:buNone/>
+            </a:pPr>
+            <a:r>
+              <a:rPr lang="en-US" sz="1600" b="1" dirty="0">
+                <a:solidFill>
+                  <a:srgbClr val="2E9E6B"/>
+                </a:solidFill>
+                <a:latin typeface="Calibri" pitchFamily="34" charset="0"/>
+                <a:ea typeface="Calibri" pitchFamily="34" charset="-122"/>
+                <a:cs typeface="Calibri" pitchFamily="34" charset="-120"/>
+              </a:rPr>
+              <a:t>OK</a:t>
+            </a:r>
+            <a:endParaRPr lang="en-US" sz="1600" dirty="0"/>
+          </a:p>
+        </p:txBody>
+      </p:sp>
+      <p:sp>
+        <p:nvSpPr>
+          <p:cNvPr id="15" name="Shape 12"/>
+          <p:cNvSpPr/>
+          <p:nvPr/>
+        </p:nvSpPr>
+        <p:spPr>
+          <a:xfrm>
+            <a:off x="548640" y="4251960"/>
+            <a:ext cx="5440680" cy="1234440"/>
+          </a:xfrm>
+          <a:prstGeom prst="roundRect">
+            <a:avLst>
+              <a:gd name="adj" fmla="val 7407"/>
+            </a:avLst>
+          </a:prstGeom>
+          <a:solidFill>
+            <a:srgbClr val="F7F6FD"/>
+          </a:solidFill>
+          <a:ln w="12700">
+            <a:solidFill>
+              <a:srgbClr val="D9D6EC"/>
+            </a:solidFill>
+            <a:prstDash val="solid"/>
+          </a:ln>
+        </p:spPr>
+      </p:sp>
+      <p:sp>
+        <p:nvSpPr>
+          <p:cNvPr id="16" name="Shape 13"/>
+          <p:cNvSpPr/>
+          <p:nvPr/>
+        </p:nvSpPr>
+        <p:spPr>
+          <a:xfrm>
+            <a:off x="777240" y="4553712"/>
+            <a:ext cx="640080" cy="640080"/>
+          </a:xfrm>
+          <a:prstGeom prst="ellipse">
+            <a:avLst/>
+          </a:prstGeom>
+          <a:solidFill>
+            <a:srgbClr val="5B3FD0"/>
+          </a:solidFill>
+          <a:ln w="12700">
+            <a:solidFill>
+              <a:srgbClr val="5B3FD0"/>
+            </a:solidFill>
+            <a:prstDash val="solid"/>
+          </a:ln>
+        </p:spPr>
+      </p:sp>
+      <p:sp>
+        <p:nvSpPr>
+          <p:cNvPr id="17" name="Text 14"/>
+          <p:cNvSpPr txBox="1"/>
+          <p:nvPr/>
+        </p:nvSpPr>
+        <p:spPr>
+          <a:xfrm>
+            <a:off x="777240" y="4553712"/>
+            <a:ext cx="640080" cy="640080"/>
+          </a:xfrm>
+          <a:prstGeom prst="rect">
+            <a:avLst/>
+          </a:prstGeom>
+          <a:noFill/>
+          <a:ln/>
+        </p:spPr>
+        <p:txBody>
+          <a:bodyPr wrap="square" lIns="0" tIns="0" rIns="0" bIns="0" rtlCol="0" anchor="ctr"/>
+          <a:lstStyle/>
+          <a:p>
+            <a:pPr algn="ctr" indent="0" marL="0">
+              <a:buNone/>
+            </a:pPr>
+            <a:r>
+              <a:rPr lang="en-US" sz="2000" b="1" dirty="0">
+                <a:solidFill>
+                  <a:srgbClr val="FFFFFF"/>
+                </a:solidFill>
+                <a:latin typeface="Calibri" pitchFamily="34" charset="0"/>
+                <a:ea typeface="Calibri" pitchFamily="34" charset="-122"/>
+                <a:cs typeface="Calibri" pitchFamily="34" charset="-120"/>
+              </a:rPr>
+              <a:t>3</a:t>
+            </a:r>
+            <a:endParaRPr lang="en-US" sz="2000" dirty="0"/>
+          </a:p>
+        </p:txBody>
+      </p:sp>
+      <p:sp>
+        <p:nvSpPr>
+          <p:cNvPr id="18" name="Text 15"/>
+          <p:cNvSpPr txBox="1"/>
+          <p:nvPr/>
+        </p:nvSpPr>
+        <p:spPr>
+          <a:xfrm>
+            <a:off x="1600200" y="4251960"/>
+            <a:ext cx="2697480" cy="1234440"/>
+          </a:xfrm>
+          <a:prstGeom prst="rect">
+            <a:avLst/>
+          </a:prstGeom>
+          <a:noFill/>
+          <a:ln/>
+        </p:spPr>
+        <p:txBody>
+          <a:bodyPr wrap="square" lIns="0" tIns="0" rIns="0" bIns="0" rtlCol="0" anchor="ctr"/>
+          <a:lstStyle/>
+          <a:p>
+            <a:pPr indent="0" marL="0">
+              <a:buNone/>
+            </a:pPr>
+            <a:r>
+              <a:rPr lang="en-US" sz="1800" b="1" dirty="0">
+                <a:solidFill>
+                  <a:srgbClr val="22253A"/>
+                </a:solidFill>
+                <a:latin typeface="Calibri" pitchFamily="34" charset="0"/>
+                <a:ea typeface="Calibri" pitchFamily="34" charset="-122"/>
+                <a:cs typeface="Calibri" pitchFamily="34" charset="-120"/>
+              </a:rPr>
+              <a:t>Elenca releases/</a:t>
+            </a:r>
+            <a:endParaRPr lang="en-US" sz="1800" dirty="0"/>
+          </a:p>
+          <a:p>
+            <a:pPr indent="0" marL="0">
+              <a:buNone/>
+            </a:pPr>
+            <a:r>
+              <a:rPr lang="en-US" sz="1500" dirty="0">
+                <a:solidFill>
+                  <a:srgbClr val="5F6478"/>
+                </a:solidFill>
+                <a:latin typeface="Courier New" pitchFamily="34" charset="0"/>
+                <a:ea typeface="Courier New" pitchFamily="34" charset="-122"/>
+                <a:cs typeface="Courier New" pitchFamily="34" charset="-120"/>
+              </a:rPr>
+              <a:t>s3:ListBucket</a:t>
+            </a:r>
+            <a:endParaRPr lang="en-US" sz="1800" dirty="0"/>
+          </a:p>
+        </p:txBody>
+      </p:sp>
+      <p:sp>
+        <p:nvSpPr>
+          <p:cNvPr id="19" name="Text 16"/>
+          <p:cNvSpPr txBox="1"/>
+          <p:nvPr/>
+        </p:nvSpPr>
+        <p:spPr>
+          <a:xfrm>
+            <a:off x="4297680" y="4251960"/>
+            <a:ext cx="1554480" cy="1234440"/>
+          </a:xfrm>
+          <a:prstGeom prst="rect">
+            <a:avLst/>
+          </a:prstGeom>
+          <a:noFill/>
+          <a:ln/>
+        </p:spPr>
+        <p:txBody>
+          <a:bodyPr wrap="square" lIns="0" tIns="0" rIns="0" bIns="0" rtlCol="0" anchor="ctr"/>
+          <a:lstStyle/>
+          <a:p>
+            <a:pPr algn="ctr" indent="0" marL="0">
+              <a:buNone/>
+            </a:pPr>
+            <a:r>
+              <a:rPr lang="en-US" sz="1600" b="1" dirty="0">
+                <a:solidFill>
+                  <a:srgbClr val="2E9E6B"/>
+                </a:solidFill>
+                <a:latin typeface="Calibri" pitchFamily="34" charset="0"/>
+                <a:ea typeface="Calibri" pitchFamily="34" charset="-122"/>
+                <a:cs typeface="Calibri" pitchFamily="34" charset="-120"/>
+              </a:rPr>
+              <a:t>OK</a:t>
+            </a:r>
+            <a:endParaRPr lang="en-US" sz="1600" dirty="0"/>
+          </a:p>
+        </p:txBody>
+      </p:sp>
+      <p:sp>
+        <p:nvSpPr>
+          <p:cNvPr id="20" name="Shape 17"/>
+          <p:cNvSpPr/>
+          <p:nvPr/>
+        </p:nvSpPr>
+        <p:spPr>
+          <a:xfrm>
+            <a:off x="6172200" y="1417320"/>
+            <a:ext cx="5440680" cy="1234440"/>
+          </a:xfrm>
+          <a:prstGeom prst="roundRect">
+            <a:avLst>
+              <a:gd name="adj" fmla="val 7407"/>
+            </a:avLst>
+          </a:prstGeom>
+          <a:solidFill>
+            <a:srgbClr val="F7F6FD"/>
+          </a:solidFill>
+          <a:ln w="12700">
+            <a:solidFill>
+              <a:srgbClr val="D9D6EC"/>
+            </a:solidFill>
+            <a:prstDash val="solid"/>
+          </a:ln>
+        </p:spPr>
+      </p:sp>
+      <p:sp>
+        <p:nvSpPr>
+          <p:cNvPr id="21" name="Shape 18"/>
+          <p:cNvSpPr/>
+          <p:nvPr/>
+        </p:nvSpPr>
+        <p:spPr>
+          <a:xfrm>
+            <a:off x="6400800" y="1719072"/>
+            <a:ext cx="640080" cy="640080"/>
+          </a:xfrm>
+          <a:prstGeom prst="ellipse">
+            <a:avLst/>
+          </a:prstGeom>
+          <a:solidFill>
+            <a:srgbClr val="5B3FD0"/>
+          </a:solidFill>
+          <a:ln w="12700">
+            <a:solidFill>
+              <a:srgbClr val="5B3FD0"/>
+            </a:solidFill>
+            <a:prstDash val="solid"/>
+          </a:ln>
+        </p:spPr>
+      </p:sp>
+      <p:sp>
+        <p:nvSpPr>
+          <p:cNvPr id="22" name="Text 19"/>
+          <p:cNvSpPr txBox="1"/>
+          <p:nvPr/>
+        </p:nvSpPr>
+        <p:spPr>
+          <a:xfrm>
+            <a:off x="6400800" y="1719072"/>
+            <a:ext cx="640080" cy="640080"/>
+          </a:xfrm>
+          <a:prstGeom prst="rect">
+            <a:avLst/>
+          </a:prstGeom>
+          <a:noFill/>
+          <a:ln/>
+        </p:spPr>
+        <p:txBody>
+          <a:bodyPr wrap="square" lIns="0" tIns="0" rIns="0" bIns="0" rtlCol="0" anchor="ctr"/>
+          <a:lstStyle/>
+          <a:p>
+            <a:pPr algn="ctr" indent="0" marL="0">
+              <a:buNone/>
+            </a:pPr>
+            <a:r>
+              <a:rPr lang="en-US" sz="2000" b="1" dirty="0">
+                <a:solidFill>
+                  <a:srgbClr val="FFFFFF"/>
+                </a:solidFill>
+                <a:latin typeface="Calibri" pitchFamily="34" charset="0"/>
+                <a:ea typeface="Calibri" pitchFamily="34" charset="-122"/>
+                <a:cs typeface="Calibri" pitchFamily="34" charset="-120"/>
+              </a:rPr>
+              <a:t>4</a:t>
+            </a:r>
+            <a:endParaRPr lang="en-US" sz="2000" dirty="0"/>
+          </a:p>
+        </p:txBody>
+      </p:sp>
+      <p:sp>
+        <p:nvSpPr>
+          <p:cNvPr id="23" name="Text 20"/>
+          <p:cNvSpPr txBox="1"/>
+          <p:nvPr/>
+        </p:nvSpPr>
+        <p:spPr>
+          <a:xfrm>
+            <a:off x="7223760" y="1417320"/>
+            <a:ext cx="2697480" cy="1234440"/>
+          </a:xfrm>
+          <a:prstGeom prst="rect">
+            <a:avLst/>
+          </a:prstGeom>
+          <a:noFill/>
+          <a:ln/>
+        </p:spPr>
+        <p:txBody>
+          <a:bodyPr wrap="square" lIns="0" tIns="0" rIns="0" bIns="0" rtlCol="0" anchor="ctr"/>
+          <a:lstStyle/>
+          <a:p>
+            <a:pPr indent="0" marL="0">
+              <a:buNone/>
+            </a:pPr>
+            <a:r>
+              <a:rPr lang="en-US" sz="1800" b="1" dirty="0">
+                <a:solidFill>
+                  <a:srgbClr val="22253A"/>
+                </a:solidFill>
+                <a:latin typeface="Calibri" pitchFamily="34" charset="0"/>
+                <a:ea typeface="Calibri" pitchFamily="34" charset="-122"/>
+                <a:cs typeface="Calibri" pitchFamily="34" charset="-120"/>
+              </a:rPr>
+              <a:t>Elenca la radice del bucket</a:t>
+            </a:r>
+            <a:endParaRPr lang="en-US" sz="1800" dirty="0"/>
+          </a:p>
+          <a:p>
+            <a:pPr indent="0" marL="0">
+              <a:buNone/>
+            </a:pPr>
+            <a:r>
+              <a:rPr lang="en-US" sz="1500" dirty="0">
+                <a:solidFill>
+                  <a:srgbClr val="5F6478"/>
+                </a:solidFill>
+                <a:latin typeface="Courier New" pitchFamily="34" charset="0"/>
+                <a:ea typeface="Courier New" pitchFamily="34" charset="-122"/>
+                <a:cs typeface="Courier New" pitchFamily="34" charset="-120"/>
+              </a:rPr>
+              <a:t>s3:ListBucket</a:t>
+            </a:r>
+            <a:endParaRPr lang="en-US" sz="1800" dirty="0"/>
+          </a:p>
+        </p:txBody>
+      </p:sp>
+      <p:sp>
+        <p:nvSpPr>
+          <p:cNvPr id="24" name="Text 21"/>
+          <p:cNvSpPr txBox="1"/>
+          <p:nvPr/>
+        </p:nvSpPr>
+        <p:spPr>
+          <a:xfrm>
+            <a:off x="9921240" y="1417320"/>
+            <a:ext cx="1554480" cy="1234440"/>
+          </a:xfrm>
+          <a:prstGeom prst="rect">
+            <a:avLst/>
+          </a:prstGeom>
+          <a:noFill/>
+          <a:ln/>
+        </p:spPr>
+        <p:txBody>
+          <a:bodyPr wrap="square" lIns="0" tIns="0" rIns="0" bIns="0" rtlCol="0" anchor="ctr"/>
+          <a:lstStyle/>
+          <a:p>
+            <a:pPr algn="ctr" indent="0" marL="0">
+              <a:buNone/>
+            </a:pPr>
+            <a:r>
+              <a:rPr lang="en-US" sz="1600" b="1" dirty="0">
+                <a:solidFill>
+                  <a:srgbClr val="D64545"/>
+                </a:solidFill>
+                <a:latin typeface="Calibri" pitchFamily="34" charset="0"/>
+                <a:ea typeface="Calibri" pitchFamily="34" charset="-122"/>
+                <a:cs typeface="Calibri" pitchFamily="34" charset="-120"/>
+              </a:rPr>
+              <a:t>negato: prefisso</a:t>
+            </a:r>
+            <a:endParaRPr lang="en-US" sz="1600" dirty="0"/>
+          </a:p>
+        </p:txBody>
+      </p:sp>
+      <p:sp>
+        <p:nvSpPr>
+          <p:cNvPr id="25" name="Shape 22"/>
+          <p:cNvSpPr/>
+          <p:nvPr/>
+        </p:nvSpPr>
+        <p:spPr>
+          <a:xfrm>
+            <a:off x="6172200" y="2834640"/>
+            <a:ext cx="5440680" cy="1234440"/>
+          </a:xfrm>
+          <a:prstGeom prst="roundRect">
+            <a:avLst>
+              <a:gd name="adj" fmla="val 7407"/>
+            </a:avLst>
+          </a:prstGeom>
+          <a:solidFill>
+            <a:srgbClr val="F7F6FD"/>
+          </a:solidFill>
+          <a:ln w="12700">
+            <a:solidFill>
+              <a:srgbClr val="D9D6EC"/>
+            </a:solidFill>
+            <a:prstDash val="solid"/>
+          </a:ln>
+        </p:spPr>
+      </p:sp>
+      <p:sp>
+        <p:nvSpPr>
+          <p:cNvPr id="26" name="Shape 23"/>
+          <p:cNvSpPr/>
+          <p:nvPr/>
+        </p:nvSpPr>
+        <p:spPr>
+          <a:xfrm>
+            <a:off x="6400800" y="3136392"/>
+            <a:ext cx="640080" cy="640080"/>
+          </a:xfrm>
+          <a:prstGeom prst="ellipse">
+            <a:avLst/>
+          </a:prstGeom>
+          <a:solidFill>
+            <a:srgbClr val="5B3FD0"/>
+          </a:solidFill>
+          <a:ln w="12700">
+            <a:solidFill>
+              <a:srgbClr val="5B3FD0"/>
+            </a:solidFill>
+            <a:prstDash val="solid"/>
+          </a:ln>
+        </p:spPr>
+      </p:sp>
+      <p:sp>
+        <p:nvSpPr>
+          <p:cNvPr id="27" name="Text 24"/>
+          <p:cNvSpPr txBox="1"/>
+          <p:nvPr/>
+        </p:nvSpPr>
+        <p:spPr>
+          <a:xfrm>
+            <a:off x="6400800" y="3136392"/>
+            <a:ext cx="640080" cy="640080"/>
+          </a:xfrm>
+          <a:prstGeom prst="rect">
+            <a:avLst/>
+          </a:prstGeom>
+          <a:noFill/>
+          <a:ln/>
+        </p:spPr>
+        <p:txBody>
+          <a:bodyPr wrap="square" lIns="0" tIns="0" rIns="0" bIns="0" rtlCol="0" anchor="ctr"/>
+          <a:lstStyle/>
+          <a:p>
+            <a:pPr algn="ctr" indent="0" marL="0">
+              <a:buNone/>
+            </a:pPr>
+            <a:r>
+              <a:rPr lang="en-US" sz="2000" b="1" dirty="0">
+                <a:solidFill>
+                  <a:srgbClr val="FFFFFF"/>
+                </a:solidFill>
+                <a:latin typeface="Calibri" pitchFamily="34" charset="0"/>
+                <a:ea typeface="Calibri" pitchFamily="34" charset="-122"/>
+                <a:cs typeface="Calibri" pitchFamily="34" charset="-120"/>
+              </a:rPr>
+              <a:t>5</a:t>
+            </a:r>
+            <a:endParaRPr lang="en-US" sz="2000" dirty="0"/>
+          </a:p>
+        </p:txBody>
+      </p:sp>
+      <p:sp>
+        <p:nvSpPr>
+          <p:cNvPr id="28" name="Text 25"/>
+          <p:cNvSpPr txBox="1"/>
+          <p:nvPr/>
+        </p:nvSpPr>
+        <p:spPr>
+          <a:xfrm>
+            <a:off x="7223760" y="2834640"/>
+            <a:ext cx="2697480" cy="1234440"/>
+          </a:xfrm>
+          <a:prstGeom prst="rect">
+            <a:avLst/>
+          </a:prstGeom>
+          <a:noFill/>
+          <a:ln/>
+        </p:spPr>
+        <p:txBody>
+          <a:bodyPr wrap="square" lIns="0" tIns="0" rIns="0" bIns="0" rtlCol="0" anchor="ctr"/>
+          <a:lstStyle/>
+          <a:p>
+            <a:pPr indent="0" marL="0">
+              <a:buNone/>
+            </a:pPr>
+            <a:r>
+              <a:rPr lang="en-US" sz="1800" b="1" dirty="0">
+                <a:solidFill>
+                  <a:srgbClr val="22253A"/>
+                </a:solidFill>
+                <a:latin typeface="Calibri" pitchFamily="34" charset="0"/>
+                <a:ea typeface="Calibri" pitchFamily="34" charset="-122"/>
+                <a:cs typeface="Calibri" pitchFamily="34" charset="-120"/>
+              </a:rPr>
+              <a:t>Carica un file</a:t>
+            </a:r>
+            <a:endParaRPr lang="en-US" sz="1800" dirty="0"/>
+          </a:p>
+          <a:p>
+            <a:pPr indent="0" marL="0">
+              <a:buNone/>
+            </a:pPr>
+            <a:r>
+              <a:rPr lang="en-US" sz="1500" dirty="0">
+                <a:solidFill>
+                  <a:srgbClr val="5F6478"/>
+                </a:solidFill>
+                <a:latin typeface="Courier New" pitchFamily="34" charset="0"/>
+                <a:ea typeface="Courier New" pitchFamily="34" charset="-122"/>
+                <a:cs typeface="Courier New" pitchFamily="34" charset="-120"/>
+              </a:rPr>
+              <a:t>s3:PutObject</a:t>
+            </a:r>
+            <a:endParaRPr lang="en-US" sz="1800" dirty="0"/>
+          </a:p>
+        </p:txBody>
+      </p:sp>
+      <p:sp>
+        <p:nvSpPr>
+          <p:cNvPr id="29" name="Text 26"/>
+          <p:cNvSpPr txBox="1"/>
+          <p:nvPr/>
+        </p:nvSpPr>
+        <p:spPr>
+          <a:xfrm>
+            <a:off x="9921240" y="2834640"/>
+            <a:ext cx="1554480" cy="1234440"/>
+          </a:xfrm>
+          <a:prstGeom prst="rect">
+            <a:avLst/>
+          </a:prstGeom>
+          <a:noFill/>
+          <a:ln/>
+        </p:spPr>
+        <p:txBody>
+          <a:bodyPr wrap="square" lIns="0" tIns="0" rIns="0" bIns="0" rtlCol="0" anchor="ctr"/>
+          <a:lstStyle/>
+          <a:p>
+            <a:pPr algn="ctr" indent="0" marL="0">
+              <a:buNone/>
+            </a:pPr>
+            <a:r>
+              <a:rPr lang="en-US" sz="1600" b="1" dirty="0">
+                <a:solidFill>
+                  <a:srgbClr val="D64545"/>
+                </a:solidFill>
+                <a:latin typeface="Calibri" pitchFamily="34" charset="0"/>
+                <a:ea typeface="Calibri" pitchFamily="34" charset="-122"/>
+                <a:cs typeface="Calibri" pitchFamily="34" charset="-120"/>
+              </a:rPr>
+              <a:t>negato: implicito</a:t>
+            </a:r>
+            <a:endParaRPr lang="en-US" sz="1600" dirty="0"/>
+          </a:p>
+        </p:txBody>
+      </p:sp>
+      <p:sp>
+        <p:nvSpPr>
+          <p:cNvPr id="30" name="Shape 27"/>
+          <p:cNvSpPr/>
+          <p:nvPr/>
+        </p:nvSpPr>
+        <p:spPr>
+          <a:xfrm>
+            <a:off x="6172200" y="4251960"/>
+            <a:ext cx="5440680" cy="1234440"/>
+          </a:xfrm>
+          <a:prstGeom prst="roundRect">
+            <a:avLst>
+              <a:gd name="adj" fmla="val 7407"/>
+            </a:avLst>
+          </a:prstGeom>
+          <a:solidFill>
+            <a:srgbClr val="F7F6FD"/>
+          </a:solidFill>
+          <a:ln w="12700">
+            <a:solidFill>
+              <a:srgbClr val="D9D6EC"/>
+            </a:solidFill>
+            <a:prstDash val="solid"/>
+          </a:ln>
+        </p:spPr>
+      </p:sp>
+      <p:sp>
+        <p:nvSpPr>
+          <p:cNvPr id="31" name="Shape 28"/>
+          <p:cNvSpPr/>
+          <p:nvPr/>
+        </p:nvSpPr>
+        <p:spPr>
+          <a:xfrm>
+            <a:off x="6400800" y="4553712"/>
+            <a:ext cx="640080" cy="640080"/>
+          </a:xfrm>
+          <a:prstGeom prst="ellipse">
+            <a:avLst/>
+          </a:prstGeom>
+          <a:solidFill>
+            <a:srgbClr val="5B3FD0"/>
+          </a:solidFill>
+          <a:ln w="12700">
+            <a:solidFill>
+              <a:srgbClr val="5B3FD0"/>
+            </a:solidFill>
+            <a:prstDash val="solid"/>
+          </a:ln>
+        </p:spPr>
+      </p:sp>
+      <p:sp>
+        <p:nvSpPr>
+          <p:cNvPr id="32" name="Text 29"/>
+          <p:cNvSpPr txBox="1"/>
+          <p:nvPr/>
+        </p:nvSpPr>
+        <p:spPr>
+          <a:xfrm>
+            <a:off x="6400800" y="4553712"/>
+            <a:ext cx="640080" cy="640080"/>
+          </a:xfrm>
+          <a:prstGeom prst="rect">
+            <a:avLst/>
+          </a:prstGeom>
+          <a:noFill/>
+          <a:ln/>
+        </p:spPr>
+        <p:txBody>
+          <a:bodyPr wrap="square" lIns="0" tIns="0" rIns="0" bIns="0" rtlCol="0" anchor="ctr"/>
+          <a:lstStyle/>
+          <a:p>
+            <a:pPr algn="ctr" indent="0" marL="0">
+              <a:buNone/>
+            </a:pPr>
+            <a:r>
+              <a:rPr lang="en-US" sz="2000" b="1" dirty="0">
+                <a:solidFill>
+                  <a:srgbClr val="FFFFFF"/>
+                </a:solidFill>
+                <a:latin typeface="Calibri" pitchFamily="34" charset="0"/>
+                <a:ea typeface="Calibri" pitchFamily="34" charset="-122"/>
+                <a:cs typeface="Calibri" pitchFamily="34" charset="-120"/>
+              </a:rPr>
+              <a:t>6</a:t>
+            </a:r>
+            <a:endParaRPr lang="en-US" sz="2000" dirty="0"/>
+          </a:p>
+        </p:txBody>
+      </p:sp>
+      <p:sp>
+        <p:nvSpPr>
+          <p:cNvPr id="33" name="Text 30"/>
+          <p:cNvSpPr txBox="1"/>
+          <p:nvPr/>
+        </p:nvSpPr>
+        <p:spPr>
+          <a:xfrm>
+            <a:off x="7223760" y="4251960"/>
+            <a:ext cx="2697480" cy="1234440"/>
+          </a:xfrm>
+          <a:prstGeom prst="rect">
+            <a:avLst/>
+          </a:prstGeom>
+          <a:noFill/>
+          <a:ln/>
+        </p:spPr>
+        <p:txBody>
+          <a:bodyPr wrap="square" lIns="0" tIns="0" rIns="0" bIns="0" rtlCol="0" anchor="ctr"/>
+          <a:lstStyle/>
+          <a:p>
+            <a:pPr indent="0" marL="0">
+              <a:buNone/>
+            </a:pPr>
+            <a:r>
+              <a:rPr lang="en-US" sz="1800" b="1" dirty="0">
+                <a:solidFill>
+                  <a:srgbClr val="22253A"/>
+                </a:solidFill>
+                <a:latin typeface="Calibri" pitchFamily="34" charset="0"/>
+                <a:ea typeface="Calibri" pitchFamily="34" charset="-122"/>
+                <a:cs typeface="Calibri" pitchFamily="34" charset="-120"/>
+              </a:rPr>
+              <a:t>Cancella un file</a:t>
+            </a:r>
+            <a:endParaRPr lang="en-US" sz="1800" dirty="0"/>
+          </a:p>
+          <a:p>
+            <a:pPr indent="0" marL="0">
+              <a:buNone/>
+            </a:pPr>
+            <a:r>
+              <a:rPr lang="en-US" sz="1500" dirty="0">
+                <a:solidFill>
+                  <a:srgbClr val="5F6478"/>
+                </a:solidFill>
+                <a:latin typeface="Courier New" pitchFamily="34" charset="0"/>
+                <a:ea typeface="Courier New" pitchFamily="34" charset="-122"/>
+                <a:cs typeface="Courier New" pitchFamily="34" charset="-120"/>
+              </a:rPr>
+              <a:t>s3:DeleteObject</a:t>
+            </a:r>
+            <a:endParaRPr lang="en-US" sz="1800" dirty="0"/>
+          </a:p>
+        </p:txBody>
+      </p:sp>
+      <p:sp>
+        <p:nvSpPr>
+          <p:cNvPr id="34" name="Text 31"/>
+          <p:cNvSpPr txBox="1"/>
+          <p:nvPr/>
+        </p:nvSpPr>
+        <p:spPr>
+          <a:xfrm>
+            <a:off x="9921240" y="4251960"/>
+            <a:ext cx="1554480" cy="1234440"/>
+          </a:xfrm>
+          <a:prstGeom prst="rect">
+            <a:avLst/>
+          </a:prstGeom>
+          <a:noFill/>
+          <a:ln/>
+        </p:spPr>
+        <p:txBody>
+          <a:bodyPr wrap="square" lIns="0" tIns="0" rIns="0" bIns="0" rtlCol="0" anchor="ctr"/>
+          <a:lstStyle/>
+          <a:p>
+            <a:pPr algn="ctr" indent="0" marL="0">
+              <a:buNone/>
+            </a:pPr>
+            <a:r>
+              <a:rPr lang="en-US" sz="1600" b="1" dirty="0">
+                <a:solidFill>
+                  <a:srgbClr val="D64545"/>
+                </a:solidFill>
+                <a:latin typeface="Calibri" pitchFamily="34" charset="0"/>
+                <a:ea typeface="Calibri" pitchFamily="34" charset="-122"/>
+                <a:cs typeface="Calibri" pitchFamily="34" charset="-120"/>
+              </a:rPr>
+              <a:t>negato: esplicito</a:t>
+            </a:r>
+            <a:endParaRPr lang="en-US" sz="1600" dirty="0"/>
+          </a:p>
+        </p:txBody>
+      </p:sp>
+      <p:sp>
+        <p:nvSpPr>
+          <p:cNvPr id="35" name="Text 32"/>
           <p:cNvSpPr txBox="1"/>
           <p:nvPr/>
         </p:nvSpPr>
@@ -13350,12 +12570,12 @@
         </p:nvSpPr>
         <p:spPr>
           <a:xfrm>
-            <a:off x="548640" y="1463040"/>
-            <a:ext cx="6675120" cy="4480560"/>
+            <a:off x="548640" y="1371600"/>
+            <a:ext cx="7040880" cy="4754880"/>
           </a:xfrm>
           <a:prstGeom prst="roundRect">
             <a:avLst>
-              <a:gd name="adj" fmla="val 1633"/>
+              <a:gd name="adj" fmla="val 1538"/>
             </a:avLst>
           </a:prstGeom>
           <a:solidFill>
@@ -13377,8 +12597,8 @@
         </p:nvSpPr>
         <p:spPr>
           <a:xfrm>
-            <a:off x="731520" y="1600200"/>
-            <a:ext cx="6309360" cy="4206240"/>
+            <a:off x="731520" y="1508760"/>
+            <a:ext cx="6675120" cy="4480560"/>
           </a:xfrm>
           <a:prstGeom prst="rect">
             <a:avLst/>
@@ -13394,7 +12614,7 @@
               <a:buNone/>
             </a:pPr>
             <a:r>
-              <a:rPr lang="en-US" sz="1300" dirty="0">
+              <a:rPr lang="en-US" sz="1600" dirty="0">
                 <a:solidFill>
                   <a:srgbClr val="E6E6F0"/>
                 </a:solidFill>
@@ -13404,14 +12624,14 @@
               </a:rPr>
               <a:t>{</a:t>
             </a:r>
-            <a:endParaRPr lang="en-US" sz="1300" dirty="0"/>
+            <a:endParaRPr lang="en-US" sz="1600" dirty="0"/>
           </a:p>
           <a:p>
             <a:pPr indent="0" marL="0">
               <a:buNone/>
             </a:pPr>
             <a:r>
-              <a:rPr lang="en-US" sz="1300" dirty="0">
+              <a:rPr lang="en-US" sz="1600" dirty="0">
                 <a:solidFill>
                   <a:srgbClr val="E6E6F0"/>
                 </a:solidFill>
@@ -13421,14 +12641,14 @@
               </a:rPr>
               <a:t>  "Version": "2012-10-17",</a:t>
             </a:r>
-            <a:endParaRPr lang="en-US" sz="1300" dirty="0"/>
+            <a:endParaRPr lang="en-US" sz="1600" dirty="0"/>
           </a:p>
           <a:p>
             <a:pPr indent="0" marL="0">
               <a:buNone/>
             </a:pPr>
             <a:r>
-              <a:rPr lang="en-US" sz="1300" dirty="0">
+              <a:rPr lang="en-US" sz="1600" dirty="0">
                 <a:solidFill>
                   <a:srgbClr val="E6E6F0"/>
                 </a:solidFill>
@@ -13438,14 +12658,14 @@
               </a:rPr>
               <a:t>  "Statement": [{</a:t>
             </a:r>
-            <a:endParaRPr lang="en-US" sz="1300" dirty="0"/>
+            <a:endParaRPr lang="en-US" sz="1600" dirty="0"/>
           </a:p>
           <a:p>
             <a:pPr indent="0" marL="0">
               <a:buNone/>
             </a:pPr>
             <a:r>
-              <a:rPr lang="en-US" sz="1300" dirty="0">
+              <a:rPr lang="en-US" sz="1600" dirty="0">
                 <a:solidFill>
                   <a:srgbClr val="E6E6F0"/>
                 </a:solidFill>
@@ -13453,16 +12673,16 @@
                 <a:ea typeface="Courier New" pitchFamily="34" charset="-122"/>
                 <a:cs typeface="Courier New" pitchFamily="34" charset="-120"/>
               </a:rPr>
-              <a:t>    "Sid": "LetturaRelease",</a:t>
-            </a:r>
-            <a:endParaRPr lang="en-US" sz="1300" dirty="0"/>
+              <a:t>    "Effect": "Allow",</a:t>
+            </a:r>
+            <a:endParaRPr lang="en-US" sz="1600" dirty="0"/>
           </a:p>
           <a:p>
             <a:pPr indent="0" marL="0">
               <a:buNone/>
             </a:pPr>
             <a:r>
-              <a:rPr lang="en-US" sz="1300" dirty="0">
+              <a:rPr lang="en-US" sz="1600" dirty="0">
                 <a:solidFill>
                   <a:srgbClr val="E6E6F0"/>
                 </a:solidFill>
@@ -13470,16 +12690,16 @@
                 <a:ea typeface="Courier New" pitchFamily="34" charset="-122"/>
                 <a:cs typeface="Courier New" pitchFamily="34" charset="-120"/>
               </a:rPr>
-              <a:t>    "Effect": "Allow",</a:t>
-            </a:r>
-            <a:endParaRPr lang="en-US" sz="1300" dirty="0"/>
+              <a:t>    "Action": "s3:GetObject",</a:t>
+            </a:r>
+            <a:endParaRPr lang="en-US" sz="1600" dirty="0"/>
           </a:p>
           <a:p>
             <a:pPr indent="0" marL="0">
               <a:buNone/>
             </a:pPr>
             <a:r>
-              <a:rPr lang="en-US" sz="1300" dirty="0">
+              <a:rPr lang="en-US" sz="1600" dirty="0">
                 <a:solidFill>
                   <a:srgbClr val="E6E6F0"/>
                 </a:solidFill>
@@ -13487,16 +12707,16 @@
                 <a:ea typeface="Courier New" pitchFamily="34" charset="-122"/>
                 <a:cs typeface="Courier New" pitchFamily="34" charset="-120"/>
               </a:rPr>
-              <a:t>    "Action": ["s3:GetObject"],</a:t>
-            </a:r>
-            <a:endParaRPr lang="en-US" sz="1300" dirty="0"/>
+              <a:t>    "Resource": "arn:aws:s3:::artefatti/releases/*",</a:t>
+            </a:r>
+            <a:endParaRPr lang="en-US" sz="1600" dirty="0"/>
           </a:p>
           <a:p>
             <a:pPr indent="0" marL="0">
               <a:buNone/>
             </a:pPr>
             <a:r>
-              <a:rPr lang="en-US" sz="1300" dirty="0">
+              <a:rPr lang="en-US" sz="1600" dirty="0">
                 <a:solidFill>
                   <a:srgbClr val="E6E6F0"/>
                 </a:solidFill>
@@ -13504,16 +12724,16 @@
                 <a:ea typeface="Courier New" pitchFamily="34" charset="-122"/>
                 <a:cs typeface="Courier New" pitchFamily="34" charset="-120"/>
               </a:rPr>
-              <a:t>    "Resource": "arn:aws:s3:::corso-artefatti/releases/*",</a:t>
-            </a:r>
-            <a:endParaRPr lang="en-US" sz="1300" dirty="0"/>
+              <a:t>    "Condition": {</a:t>
+            </a:r>
+            <a:endParaRPr lang="en-US" sz="1600" dirty="0"/>
           </a:p>
           <a:p>
             <a:pPr indent="0" marL="0">
               <a:buNone/>
             </a:pPr>
             <a:r>
-              <a:rPr lang="en-US" sz="1300" dirty="0">
+              <a:rPr lang="en-US" sz="1600" dirty="0">
                 <a:solidFill>
                   <a:srgbClr val="E6E6F0"/>
                 </a:solidFill>
@@ -13521,16 +12741,16 @@
                 <a:ea typeface="Courier New" pitchFamily="34" charset="-122"/>
                 <a:cs typeface="Courier New" pitchFamily="34" charset="-120"/>
               </a:rPr>
-              <a:t>    "Condition": {</a:t>
-            </a:r>
-            <a:endParaRPr lang="en-US" sz="1300" dirty="0"/>
+              <a:t>      "StringEquals": {</a:t>
+            </a:r>
+            <a:endParaRPr lang="en-US" sz="1600" dirty="0"/>
           </a:p>
           <a:p>
             <a:pPr indent="0" marL="0">
               <a:buNone/>
             </a:pPr>
             <a:r>
-              <a:rPr lang="en-US" sz="1300" dirty="0">
+              <a:rPr lang="en-US" sz="1600" dirty="0">
                 <a:solidFill>
                   <a:srgbClr val="E6E6F0"/>
                 </a:solidFill>
@@ -13538,16 +12758,16 @@
                 <a:ea typeface="Courier New" pitchFamily="34" charset="-122"/>
                 <a:cs typeface="Courier New" pitchFamily="34" charset="-120"/>
               </a:rPr>
-              <a:t>      "StringEquals": { "aws:SourceVpce": "vpce-0abc123" }</a:t>
-            </a:r>
-            <a:endParaRPr lang="en-US" sz="1300" dirty="0"/>
+              <a:t>        "aws:SourceVpce": "vpce-0abc123"</a:t>
+            </a:r>
+            <a:endParaRPr lang="en-US" sz="1600" dirty="0"/>
           </a:p>
           <a:p>
             <a:pPr indent="0" marL="0">
               <a:buNone/>
             </a:pPr>
             <a:r>
-              <a:rPr lang="en-US" sz="1300" dirty="0">
+              <a:rPr lang="en-US" sz="1600" dirty="0">
                 <a:solidFill>
                   <a:srgbClr val="E6E6F0"/>
                 </a:solidFill>
@@ -13555,16 +12775,16 @@
                 <a:ea typeface="Courier New" pitchFamily="34" charset="-122"/>
                 <a:cs typeface="Courier New" pitchFamily="34" charset="-120"/>
               </a:rPr>
-              <a:t>    }</a:t>
-            </a:r>
-            <a:endParaRPr lang="en-US" sz="1300" dirty="0"/>
+              <a:t>      }</a:t>
+            </a:r>
+            <a:endParaRPr lang="en-US" sz="1600" dirty="0"/>
           </a:p>
           <a:p>
             <a:pPr indent="0" marL="0">
               <a:buNone/>
             </a:pPr>
             <a:r>
-              <a:rPr lang="en-US" sz="1300" dirty="0">
+              <a:rPr lang="en-US" sz="1600" dirty="0">
                 <a:solidFill>
                   <a:srgbClr val="E6E6F0"/>
                 </a:solidFill>
@@ -13572,16 +12792,16 @@
                 <a:ea typeface="Courier New" pitchFamily="34" charset="-122"/>
                 <a:cs typeface="Courier New" pitchFamily="34" charset="-120"/>
               </a:rPr>
-              <a:t>  }]</a:t>
-            </a:r>
-            <a:endParaRPr lang="en-US" sz="1300" dirty="0"/>
+              <a:t>    }</a:t>
+            </a:r>
+            <a:endParaRPr lang="en-US" sz="1600" dirty="0"/>
           </a:p>
           <a:p>
             <a:pPr indent="0" marL="0">
               <a:buNone/>
             </a:pPr>
             <a:r>
-              <a:rPr lang="en-US" sz="1300" dirty="0">
+              <a:rPr lang="en-US" sz="1600" dirty="0">
                 <a:solidFill>
                   <a:srgbClr val="E6E6F0"/>
                 </a:solidFill>
@@ -13589,9 +12809,26 @@
                 <a:ea typeface="Courier New" pitchFamily="34" charset="-122"/>
                 <a:cs typeface="Courier New" pitchFamily="34" charset="-120"/>
               </a:rPr>
+              <a:t>  }]</a:t>
+            </a:r>
+            <a:endParaRPr lang="en-US" sz="1600" dirty="0"/>
+          </a:p>
+          <a:p>
+            <a:pPr indent="0" marL="0">
+              <a:buNone/>
+            </a:pPr>
+            <a:r>
+              <a:rPr lang="en-US" sz="1600" dirty="0">
+                <a:solidFill>
+                  <a:srgbClr val="E6E6F0"/>
+                </a:solidFill>
+                <a:latin typeface="Courier New" pitchFamily="34" charset="0"/>
+                <a:ea typeface="Courier New" pitchFamily="34" charset="-122"/>
+                <a:cs typeface="Courier New" pitchFamily="34" charset="-120"/>
+              </a:rPr>
               <a:t>}</a:t>
             </a:r>
-            <a:endParaRPr lang="en-US" sz="1300" dirty="0"/>
+            <a:endParaRPr lang="en-US" sz="1600" dirty="0"/>
           </a:p>
         </p:txBody>
       </p:sp>
@@ -13610,18 +12847,18 @@
           </p:nvPr>
         </p:nvGraphicFramePr>
         <p:xfrm>
-          <a:off x="7406640" y="1463040"/>
-          <a:ext cx="4233672" cy="914400"/>
+          <a:off x="7772400" y="1371600"/>
+          <a:ext cx="3867912" cy="914400"/>
         </p:xfrm>
         <a:graphic>
           <a:graphicData uri="http://schemas.openxmlformats.org/drawingml/2006/table">
             <a:tbl>
               <a:tblPr/>
               <a:tblGrid>
-                <a:gridCol w="1463040"/>
-                <a:gridCol w="2770632"/>
+                <a:gridCol w="1417320"/>
+                <a:gridCol w="2450592"/>
               </a:tblGrid>
-              <a:tr h="566928">
+              <a:tr h="640080">
                 <a:tc>
                   <a:txBody>
                     <a:bodyPr/>
@@ -13759,7 +12996,7 @@
                   </a:tcPr>
                 </a:tc>
               </a:tr>
-              <a:tr h="566928">
+              <a:tr h="640080">
                 <a:tc>
                   <a:txBody>
                     <a:bodyPr/>
@@ -13897,7 +13134,7 @@
                   </a:tcPr>
                 </a:tc>
               </a:tr>
-              <a:tr h="566928">
+              <a:tr h="640080">
                 <a:tc>
                   <a:txBody>
                     <a:bodyPr/>
@@ -14035,7 +13272,7 @@
                   </a:tcPr>
                 </a:tc>
               </a:tr>
-              <a:tr h="566928">
+              <a:tr h="640080">
                 <a:tc>
                   <a:txBody>
                     <a:bodyPr/>
@@ -14173,7 +13410,7 @@
                   </a:tcPr>
                 </a:tc>
               </a:tr>
-              <a:tr h="566928">
+              <a:tr h="640080">
                 <a:tc>
                   <a:txBody>
                     <a:bodyPr/>
@@ -14259,7 +13496,7 @@
                           <a:ea typeface="Calibri" pitchFamily="34" charset="-122"/>
                           <a:cs typeface="Calibri" pitchFamily="34" charset="-120"/>
                         </a:rPr>
-                        <a:t>vincoli: rete, MFA, tag…</a:t>
+                        <a:t>vincoli: rete, MFA…</a:t>
                       </a:r>
                       <a:endParaRPr lang="en-US" sz="1500" dirty="0">
                         <a:latin typeface="Calibri" charset="0"/>
@@ -14311,7 +13548,7 @@
                   </a:tcPr>
                 </a:tc>
               </a:tr>
-              <a:tr h="566928">
+              <a:tr h="640080">
                 <a:tc>
                   <a:txBody>
                     <a:bodyPr/>
@@ -14397,7 +13634,7 @@
                           <a:ea typeface="Calibri" pitchFamily="34" charset="-122"/>
                           <a:cs typeface="Calibri" pitchFamily="34" charset="-120"/>
                         </a:rPr>
-                        <a:t>chi: solo nelle resource-based</a:t>
+                        <a:t>chi (solo resource-based)</a:t>
                       </a:r>
                       <a:endParaRPr lang="en-US" sz="1500" dirty="0">
                         <a:latin typeface="Calibri" charset="0"/>
@@ -14455,6 +13692,45 @@
       </p:graphicFrame>
       <p:sp>
         <p:nvSpPr>
+          <p:cNvPr id="8" name="Text 4"/>
+          <p:cNvSpPr txBox="1"/>
+          <p:nvPr/>
+        </p:nvSpPr>
+        <p:spPr>
+          <a:xfrm>
+            <a:off x="7772400" y="5394960"/>
+            <a:ext cx="3867912" cy="731520"/>
+          </a:xfrm>
+          <a:prstGeom prst="rect">
+            <a:avLst/>
+          </a:prstGeom>
+          <a:noFill/>
+          <a:ln/>
+        </p:spPr>
+        <p:txBody>
+          <a:bodyPr wrap="square" lIns="0" tIns="0" rIns="0" bIns="0" rtlCol="0" anchor="t"/>
+          <a:lstStyle/>
+          <a:p>
+            <a:pPr algn="l" indent="0" marL="0">
+              <a:buNone/>
+            </a:pPr>
+            <a:r>
+              <a:rPr lang="en-US" sz="1400" i="1" dirty="0">
+                <a:solidFill>
+                  <a:srgbClr val="5F6478"/>
+                </a:solidFill>
+                <a:latin typeface="Calibri" pitchFamily="34" charset="0"/>
+                <a:ea typeface="Calibri" pitchFamily="34" charset="-122"/>
+                <a:cs typeface="Calibri" pitchFamily="34" charset="-120"/>
+              </a:rPr>
+              <a:t>Consenti di leggere i file sotto releases/, solo se la richiesta arriva da quel punto di accesso privato.</a:t>
+            </a:r>
+            <a:endParaRPr lang="en-US" sz="1400" dirty="0"/>
+          </a:p>
+        </p:txBody>
+      </p:sp>
+      <p:sp>
+        <p:nvSpPr>
           <p:cNvPr id="25" name="Slide Number Placeholder 0"/>
           <p:cNvSpPr>
             <a:spLocks noGrp="1"/>
@@ -16001,669 +15277,220 @@
           </a:p>
         </p:txBody>
       </p:sp>
-      <p:graphicFrame>
-        <p:nvGraphicFramePr>
-          <p:cNvPr id="8" name="Table 0"/>
-          <p:cNvGraphicFramePr>
-            <a:graphicFrameLocks noGrp="1"/>
-          </p:cNvGraphicFramePr>
-          <p:nvPr>
-            <p:extLst>
-              <p:ext uri="{D42A27DB-BD31-4B8C-83A1-F6EECF244321}">
-                <p14:modId xmlns:p14="http://schemas.microsoft.com/office/powerpoint/2010/main" val="1579011935"/>
-              </p:ext>
-            </p:extLst>
-          </p:nvPr>
-        </p:nvGraphicFramePr>
-        <p:xfrm>
-          <a:off x="5943600" y="1463040"/>
-          <a:ext cx="5696712" cy="914400"/>
-        </p:xfrm>
-        <a:graphic>
-          <a:graphicData uri="http://schemas.openxmlformats.org/drawingml/2006/table">
-            <a:tbl>
-              <a:tblPr/>
-              <a:tblGrid>
-                <a:gridCol w="1874520"/>
-                <a:gridCol w="1417320"/>
-                <a:gridCol w="2404872"/>
-              </a:tblGrid>
-              <a:tr h="822960">
-                <a:tc>
-                  <a:txBody>
-                    <a:bodyPr/>
-                    <a:lstStyle/>
-                    <a:p>
-                      <a:pPr indent="0" marL="0">
-                        <a:buNone/>
-                      </a:pPr>
-                      <a:r>
-                        <a:rPr lang="en-US" sz="1300" b="1" dirty="0">
-                          <a:solidFill>
-                            <a:srgbClr val="FFFFFF"/>
-                          </a:solidFill>
-                          <a:latin typeface="Calibri" pitchFamily="34" charset="0"/>
-                          <a:ea typeface="Calibri" pitchFamily="34" charset="-122"/>
-                          <a:cs typeface="Calibri" pitchFamily="34" charset="-120"/>
-                        </a:rPr>
-                        <a:t>Azione</a:t>
-                      </a:r>
-                      <a:endParaRPr lang="en-US" sz="1300" dirty="0">
-                        <a:latin typeface="Calibri" charset="0"/>
-                        <a:ea typeface="Calibri" charset="0"/>
-                        <a:cs typeface="Calibri" charset="0"/>
-                      </a:endParaRPr>
-                    </a:p>
-                  </a:txBody>
-                  <a:tcPr marL="73152" marR="73152" marT="73152" marB="73152" anchor="ctr">
-                    <a:lnL w="9525" cap="flat" cmpd="sng" algn="ctr">
-                      <a:solidFill>
-                        <a:srgbClr val="D9D6EC"/>
-                      </a:solidFill>
-                      <a:prstDash val="solid"/>
-                      <a:round/>
-                      <a:headEnd type="none" w="med" len="med"/>
-                      <a:tailEnd type="none" w="med" len="med"/>
-                    </a:lnL>
-                    <a:lnR w="9525" cap="flat" cmpd="sng" algn="ctr">
-                      <a:solidFill>
-                        <a:srgbClr val="D9D6EC"/>
-                      </a:solidFill>
-                      <a:prstDash val="solid"/>
-                      <a:round/>
-                      <a:headEnd type="none" w="med" len="med"/>
-                      <a:tailEnd type="none" w="med" len="med"/>
-                    </a:lnR>
-                    <a:lnT w="9525" cap="flat" cmpd="sng" algn="ctr">
-                      <a:solidFill>
-                        <a:srgbClr val="D9D6EC"/>
-                      </a:solidFill>
-                      <a:prstDash val="solid"/>
-                      <a:round/>
-                      <a:headEnd type="none" w="med" len="med"/>
-                      <a:tailEnd type="none" w="med" len="med"/>
-                    </a:lnT>
-                    <a:lnB w="9525" cap="flat" cmpd="sng" algn="ctr">
-                      <a:solidFill>
-                        <a:srgbClr val="D9D6EC"/>
-                      </a:solidFill>
-                      <a:prstDash val="solid"/>
-                      <a:round/>
-                      <a:headEnd type="none" w="med" len="med"/>
-                      <a:tailEnd type="none" w="med" len="med"/>
-                    </a:lnB>
-                    <a:solidFill>
-                      <a:srgbClr val="5B3FD0"/>
-                    </a:solidFill>
-                  </a:tcPr>
-                </a:tc>
-                <a:tc>
-                  <a:txBody>
-                    <a:bodyPr/>
-                    <a:lstStyle/>
-                    <a:p>
-                      <a:pPr indent="0" marL="0">
-                        <a:buNone/>
-                      </a:pPr>
-                      <a:r>
-                        <a:rPr lang="en-US" sz="1300" b="1" dirty="0">
-                          <a:solidFill>
-                            <a:srgbClr val="FFFFFF"/>
-                          </a:solidFill>
-                          <a:latin typeface="Calibri" pitchFamily="34" charset="0"/>
-                          <a:ea typeface="Calibri" pitchFamily="34" charset="-122"/>
-                          <a:cs typeface="Calibri" pitchFamily="34" charset="-120"/>
-                        </a:rPr>
-                        <a:t>Si applica a</a:t>
-                      </a:r>
-                      <a:endParaRPr lang="en-US" sz="1300" dirty="0">
-                        <a:latin typeface="Calibri" charset="0"/>
-                        <a:ea typeface="Calibri" charset="0"/>
-                        <a:cs typeface="Calibri" charset="0"/>
-                      </a:endParaRPr>
-                    </a:p>
-                  </a:txBody>
-                  <a:tcPr marL="73152" marR="73152" marT="73152" marB="73152" anchor="ctr">
-                    <a:lnL w="9525" cap="flat" cmpd="sng" algn="ctr">
-                      <a:solidFill>
-                        <a:srgbClr val="D9D6EC"/>
-                      </a:solidFill>
-                      <a:prstDash val="solid"/>
-                      <a:round/>
-                      <a:headEnd type="none" w="med" len="med"/>
-                      <a:tailEnd type="none" w="med" len="med"/>
-                    </a:lnL>
-                    <a:lnR w="9525" cap="flat" cmpd="sng" algn="ctr">
-                      <a:solidFill>
-                        <a:srgbClr val="D9D6EC"/>
-                      </a:solidFill>
-                      <a:prstDash val="solid"/>
-                      <a:round/>
-                      <a:headEnd type="none" w="med" len="med"/>
-                      <a:tailEnd type="none" w="med" len="med"/>
-                    </a:lnR>
-                    <a:lnT w="9525" cap="flat" cmpd="sng" algn="ctr">
-                      <a:solidFill>
-                        <a:srgbClr val="D9D6EC"/>
-                      </a:solidFill>
-                      <a:prstDash val="solid"/>
-                      <a:round/>
-                      <a:headEnd type="none" w="med" len="med"/>
-                      <a:tailEnd type="none" w="med" len="med"/>
-                    </a:lnT>
-                    <a:lnB w="9525" cap="flat" cmpd="sng" algn="ctr">
-                      <a:solidFill>
-                        <a:srgbClr val="D9D6EC"/>
-                      </a:solidFill>
-                      <a:prstDash val="solid"/>
-                      <a:round/>
-                      <a:headEnd type="none" w="med" len="med"/>
-                      <a:tailEnd type="none" w="med" len="med"/>
-                    </a:lnB>
-                    <a:solidFill>
-                      <a:srgbClr val="5B3FD0"/>
-                    </a:solidFill>
-                  </a:tcPr>
-                </a:tc>
-                <a:tc>
-                  <a:txBody>
-                    <a:bodyPr/>
-                    <a:lstStyle/>
-                    <a:p>
-                      <a:pPr indent="0" marL="0">
-                        <a:buNone/>
-                      </a:pPr>
-                      <a:r>
-                        <a:rPr lang="en-US" sz="1300" b="1" dirty="0">
-                          <a:solidFill>
-                            <a:srgbClr val="FFFFFF"/>
-                          </a:solidFill>
-                          <a:latin typeface="Calibri" pitchFamily="34" charset="0"/>
-                          <a:ea typeface="Calibri" pitchFamily="34" charset="-122"/>
-                          <a:cs typeface="Calibri" pitchFamily="34" charset="-120"/>
-                        </a:rPr>
-                        <a:t>ARN</a:t>
-                      </a:r>
-                      <a:endParaRPr lang="en-US" sz="1300" dirty="0">
-                        <a:latin typeface="Calibri" charset="0"/>
-                        <a:ea typeface="Calibri" charset="0"/>
-                        <a:cs typeface="Calibri" charset="0"/>
-                      </a:endParaRPr>
-                    </a:p>
-                  </a:txBody>
-                  <a:tcPr marL="73152" marR="73152" marT="73152" marB="73152" anchor="ctr">
-                    <a:lnL w="9525" cap="flat" cmpd="sng" algn="ctr">
-                      <a:solidFill>
-                        <a:srgbClr val="D9D6EC"/>
-                      </a:solidFill>
-                      <a:prstDash val="solid"/>
-                      <a:round/>
-                      <a:headEnd type="none" w="med" len="med"/>
-                      <a:tailEnd type="none" w="med" len="med"/>
-                    </a:lnL>
-                    <a:lnR w="9525" cap="flat" cmpd="sng" algn="ctr">
-                      <a:solidFill>
-                        <a:srgbClr val="D9D6EC"/>
-                      </a:solidFill>
-                      <a:prstDash val="solid"/>
-                      <a:round/>
-                      <a:headEnd type="none" w="med" len="med"/>
-                      <a:tailEnd type="none" w="med" len="med"/>
-                    </a:lnR>
-                    <a:lnT w="9525" cap="flat" cmpd="sng" algn="ctr">
-                      <a:solidFill>
-                        <a:srgbClr val="D9D6EC"/>
-                      </a:solidFill>
-                      <a:prstDash val="solid"/>
-                      <a:round/>
-                      <a:headEnd type="none" w="med" len="med"/>
-                      <a:tailEnd type="none" w="med" len="med"/>
-                    </a:lnT>
-                    <a:lnB w="9525" cap="flat" cmpd="sng" algn="ctr">
-                      <a:solidFill>
-                        <a:srgbClr val="D9D6EC"/>
-                      </a:solidFill>
-                      <a:prstDash val="solid"/>
-                      <a:round/>
-                      <a:headEnd type="none" w="med" len="med"/>
-                      <a:tailEnd type="none" w="med" len="med"/>
-                    </a:lnB>
-                    <a:solidFill>
-                      <a:srgbClr val="5B3FD0"/>
-                    </a:solidFill>
-                  </a:tcPr>
-                </a:tc>
-              </a:tr>
-              <a:tr h="822960">
-                <a:tc>
-                  <a:txBody>
-                    <a:bodyPr/>
-                    <a:lstStyle/>
-                    <a:p>
-                      <a:pPr indent="0" marL="0">
-                        <a:buNone/>
-                      </a:pPr>
-                      <a:r>
-                        <a:rPr lang="en-US" sz="1300" dirty="0">
-                          <a:solidFill>
-                            <a:srgbClr val="22253A"/>
-                          </a:solidFill>
-                          <a:latin typeface="Courier New" pitchFamily="34" charset="0"/>
-                          <a:ea typeface="Courier New" pitchFamily="34" charset="-122"/>
-                          <a:cs typeface="Courier New" pitchFamily="34" charset="-120"/>
-                        </a:rPr>
-                        <a:t>s3:ListBucket</a:t>
-                      </a:r>
-                      <a:endParaRPr lang="en-US" sz="1300" dirty="0">
-                        <a:latin typeface="Courier New" charset="0"/>
-                        <a:ea typeface="Courier New" charset="0"/>
-                        <a:cs typeface="Courier New" charset="0"/>
-                      </a:endParaRPr>
-                    </a:p>
-                  </a:txBody>
-                  <a:tcPr marL="73152" marR="73152" marT="73152" marB="73152" anchor="ctr">
-                    <a:lnL w="9525" cap="flat" cmpd="sng" algn="ctr">
-                      <a:solidFill>
-                        <a:srgbClr val="D9D6EC"/>
-                      </a:solidFill>
-                      <a:prstDash val="solid"/>
-                      <a:round/>
-                      <a:headEnd type="none" w="med" len="med"/>
-                      <a:tailEnd type="none" w="med" len="med"/>
-                    </a:lnL>
-                    <a:lnR w="9525" cap="flat" cmpd="sng" algn="ctr">
-                      <a:solidFill>
-                        <a:srgbClr val="D9D6EC"/>
-                      </a:solidFill>
-                      <a:prstDash val="solid"/>
-                      <a:round/>
-                      <a:headEnd type="none" w="med" len="med"/>
-                      <a:tailEnd type="none" w="med" len="med"/>
-                    </a:lnR>
-                    <a:lnT w="9525" cap="flat" cmpd="sng" algn="ctr">
-                      <a:solidFill>
-                        <a:srgbClr val="D9D6EC"/>
-                      </a:solidFill>
-                      <a:prstDash val="solid"/>
-                      <a:round/>
-                      <a:headEnd type="none" w="med" len="med"/>
-                      <a:tailEnd type="none" w="med" len="med"/>
-                    </a:lnT>
-                    <a:lnB w="9525" cap="flat" cmpd="sng" algn="ctr">
-                      <a:solidFill>
-                        <a:srgbClr val="D9D6EC"/>
-                      </a:solidFill>
-                      <a:prstDash val="solid"/>
-                      <a:round/>
-                      <a:headEnd type="none" w="med" len="med"/>
-                      <a:tailEnd type="none" w="med" len="med"/>
-                    </a:lnB>
-                    <a:solidFill>
-                      <a:srgbClr val="FFFFFF"/>
-                    </a:solidFill>
-                  </a:tcPr>
-                </a:tc>
-                <a:tc>
-                  <a:txBody>
-                    <a:bodyPr/>
-                    <a:lstStyle/>
-                    <a:p>
-                      <a:pPr indent="0" marL="0">
-                        <a:buNone/>
-                      </a:pPr>
-                      <a:r>
-                        <a:rPr lang="en-US" sz="1300" dirty="0">
-                          <a:solidFill>
-                            <a:srgbClr val="22253A"/>
-                          </a:solidFill>
-                          <a:latin typeface="Calibri" pitchFamily="34" charset="0"/>
-                          <a:ea typeface="Calibri" pitchFamily="34" charset="-122"/>
-                          <a:cs typeface="Calibri" pitchFamily="34" charset="-120"/>
-                        </a:rPr>
-                        <a:t>il bucket (elencare)</a:t>
-                      </a:r>
-                      <a:endParaRPr lang="en-US" sz="1300" dirty="0">
-                        <a:latin typeface="Calibri" charset="0"/>
-                        <a:ea typeface="Calibri" charset="0"/>
-                        <a:cs typeface="Calibri" charset="0"/>
-                      </a:endParaRPr>
-                    </a:p>
-                  </a:txBody>
-                  <a:tcPr marL="73152" marR="73152" marT="73152" marB="73152" anchor="ctr">
-                    <a:lnL w="9525" cap="flat" cmpd="sng" algn="ctr">
-                      <a:solidFill>
-                        <a:srgbClr val="D9D6EC"/>
-                      </a:solidFill>
-                      <a:prstDash val="solid"/>
-                      <a:round/>
-                      <a:headEnd type="none" w="med" len="med"/>
-                      <a:tailEnd type="none" w="med" len="med"/>
-                    </a:lnL>
-                    <a:lnR w="9525" cap="flat" cmpd="sng" algn="ctr">
-                      <a:solidFill>
-                        <a:srgbClr val="D9D6EC"/>
-                      </a:solidFill>
-                      <a:prstDash val="solid"/>
-                      <a:round/>
-                      <a:headEnd type="none" w="med" len="med"/>
-                      <a:tailEnd type="none" w="med" len="med"/>
-                    </a:lnR>
-                    <a:lnT w="9525" cap="flat" cmpd="sng" algn="ctr">
-                      <a:solidFill>
-                        <a:srgbClr val="D9D6EC"/>
-                      </a:solidFill>
-                      <a:prstDash val="solid"/>
-                      <a:round/>
-                      <a:headEnd type="none" w="med" len="med"/>
-                      <a:tailEnd type="none" w="med" len="med"/>
-                    </a:lnT>
-                    <a:lnB w="9525" cap="flat" cmpd="sng" algn="ctr">
-                      <a:solidFill>
-                        <a:srgbClr val="D9D6EC"/>
-                      </a:solidFill>
-                      <a:prstDash val="solid"/>
-                      <a:round/>
-                      <a:headEnd type="none" w="med" len="med"/>
-                      <a:tailEnd type="none" w="med" len="med"/>
-                    </a:lnB>
-                    <a:solidFill>
-                      <a:srgbClr val="FFFFFF"/>
-                    </a:solidFill>
-                  </a:tcPr>
-                </a:tc>
-                <a:tc>
-                  <a:txBody>
-                    <a:bodyPr/>
-                    <a:lstStyle/>
-                    <a:p>
-                      <a:pPr indent="0" marL="0">
-                        <a:buNone/>
-                      </a:pPr>
-                      <a:r>
-                        <a:rPr lang="en-US" sz="1300" dirty="0">
-                          <a:solidFill>
-                            <a:srgbClr val="22253A"/>
-                          </a:solidFill>
-                          <a:latin typeface="Courier New" pitchFamily="34" charset="0"/>
-                          <a:ea typeface="Courier New" pitchFamily="34" charset="-122"/>
-                          <a:cs typeface="Courier New" pitchFamily="34" charset="-120"/>
-                        </a:rPr>
-                        <a:t>arn:aws:s3:::corso-artefatti</a:t>
-                      </a:r>
-                      <a:endParaRPr lang="en-US" sz="1300" dirty="0">
-                        <a:latin typeface="Courier New" charset="0"/>
-                        <a:ea typeface="Courier New" charset="0"/>
-                        <a:cs typeface="Courier New" charset="0"/>
-                      </a:endParaRPr>
-                    </a:p>
-                  </a:txBody>
-                  <a:tcPr marL="73152" marR="73152" marT="73152" marB="73152" anchor="ctr">
-                    <a:lnL w="9525" cap="flat" cmpd="sng" algn="ctr">
-                      <a:solidFill>
-                        <a:srgbClr val="D9D6EC"/>
-                      </a:solidFill>
-                      <a:prstDash val="solid"/>
-                      <a:round/>
-                      <a:headEnd type="none" w="med" len="med"/>
-                      <a:tailEnd type="none" w="med" len="med"/>
-                    </a:lnL>
-                    <a:lnR w="9525" cap="flat" cmpd="sng" algn="ctr">
-                      <a:solidFill>
-                        <a:srgbClr val="D9D6EC"/>
-                      </a:solidFill>
-                      <a:prstDash val="solid"/>
-                      <a:round/>
-                      <a:headEnd type="none" w="med" len="med"/>
-                      <a:tailEnd type="none" w="med" len="med"/>
-                    </a:lnR>
-                    <a:lnT w="9525" cap="flat" cmpd="sng" algn="ctr">
-                      <a:solidFill>
-                        <a:srgbClr val="D9D6EC"/>
-                      </a:solidFill>
-                      <a:prstDash val="solid"/>
-                      <a:round/>
-                      <a:headEnd type="none" w="med" len="med"/>
-                      <a:tailEnd type="none" w="med" len="med"/>
-                    </a:lnT>
-                    <a:lnB w="9525" cap="flat" cmpd="sng" algn="ctr">
-                      <a:solidFill>
-                        <a:srgbClr val="D9D6EC"/>
-                      </a:solidFill>
-                      <a:prstDash val="solid"/>
-                      <a:round/>
-                      <a:headEnd type="none" w="med" len="med"/>
-                      <a:tailEnd type="none" w="med" len="med"/>
-                    </a:lnB>
-                    <a:solidFill>
-                      <a:srgbClr val="FFFFFF"/>
-                    </a:solidFill>
-                  </a:tcPr>
-                </a:tc>
-              </a:tr>
-              <a:tr h="822960">
-                <a:tc>
-                  <a:txBody>
-                    <a:bodyPr/>
-                    <a:lstStyle/>
-                    <a:p>
-                      <a:pPr indent="0" marL="0">
-                        <a:buNone/>
-                      </a:pPr>
-                      <a:r>
-                        <a:rPr lang="en-US" sz="1300" dirty="0">
-                          <a:solidFill>
-                            <a:srgbClr val="22253A"/>
-                          </a:solidFill>
-                          <a:latin typeface="Courier New" pitchFamily="34" charset="0"/>
-                          <a:ea typeface="Courier New" pitchFamily="34" charset="-122"/>
-                          <a:cs typeface="Courier New" pitchFamily="34" charset="-120"/>
-                        </a:rPr>
-                        <a:t>s3:GetObject</a:t>
-                      </a:r>
-                      <a:endParaRPr lang="en-US" sz="1300" dirty="0">
-                        <a:latin typeface="Courier New" charset="0"/>
-                        <a:ea typeface="Courier New" charset="0"/>
-                        <a:cs typeface="Courier New" charset="0"/>
-                      </a:endParaRPr>
-                    </a:p>
-                  </a:txBody>
-                  <a:tcPr marL="73152" marR="73152" marT="73152" marB="73152" anchor="ctr">
-                    <a:lnL w="9525" cap="flat" cmpd="sng" algn="ctr">
-                      <a:solidFill>
-                        <a:srgbClr val="D9D6EC"/>
-                      </a:solidFill>
-                      <a:prstDash val="solid"/>
-                      <a:round/>
-                      <a:headEnd type="none" w="med" len="med"/>
-                      <a:tailEnd type="none" w="med" len="med"/>
-                    </a:lnL>
-                    <a:lnR w="9525" cap="flat" cmpd="sng" algn="ctr">
-                      <a:solidFill>
-                        <a:srgbClr val="D9D6EC"/>
-                      </a:solidFill>
-                      <a:prstDash val="solid"/>
-                      <a:round/>
-                      <a:headEnd type="none" w="med" len="med"/>
-                      <a:tailEnd type="none" w="med" len="med"/>
-                    </a:lnR>
-                    <a:lnT w="9525" cap="flat" cmpd="sng" algn="ctr">
-                      <a:solidFill>
-                        <a:srgbClr val="D9D6EC"/>
-                      </a:solidFill>
-                      <a:prstDash val="solid"/>
-                      <a:round/>
-                      <a:headEnd type="none" w="med" len="med"/>
-                      <a:tailEnd type="none" w="med" len="med"/>
-                    </a:lnT>
-                    <a:lnB w="9525" cap="flat" cmpd="sng" algn="ctr">
-                      <a:solidFill>
-                        <a:srgbClr val="D9D6EC"/>
-                      </a:solidFill>
-                      <a:prstDash val="solid"/>
-                      <a:round/>
-                      <a:headEnd type="none" w="med" len="med"/>
-                      <a:tailEnd type="none" w="med" len="med"/>
-                    </a:lnB>
-                    <a:solidFill>
-                      <a:srgbClr val="F7F6FD"/>
-                    </a:solidFill>
-                  </a:tcPr>
-                </a:tc>
-                <a:tc>
-                  <a:txBody>
-                    <a:bodyPr/>
-                    <a:lstStyle/>
-                    <a:p>
-                      <a:pPr indent="0" marL="0">
-                        <a:buNone/>
-                      </a:pPr>
-                      <a:r>
-                        <a:rPr lang="en-US" sz="1300" dirty="0">
-                          <a:solidFill>
-                            <a:srgbClr val="22253A"/>
-                          </a:solidFill>
-                          <a:latin typeface="Calibri" pitchFamily="34" charset="0"/>
-                          <a:ea typeface="Calibri" pitchFamily="34" charset="-122"/>
-                          <a:cs typeface="Calibri" pitchFamily="34" charset="-120"/>
-                        </a:rPr>
-                        <a:t>gli oggetti (scaricare)</a:t>
-                      </a:r>
-                      <a:endParaRPr lang="en-US" sz="1300" dirty="0">
-                        <a:latin typeface="Calibri" charset="0"/>
-                        <a:ea typeface="Calibri" charset="0"/>
-                        <a:cs typeface="Calibri" charset="0"/>
-                      </a:endParaRPr>
-                    </a:p>
-                  </a:txBody>
-                  <a:tcPr marL="73152" marR="73152" marT="73152" marB="73152" anchor="ctr">
-                    <a:lnL w="9525" cap="flat" cmpd="sng" algn="ctr">
-                      <a:solidFill>
-                        <a:srgbClr val="D9D6EC"/>
-                      </a:solidFill>
-                      <a:prstDash val="solid"/>
-                      <a:round/>
-                      <a:headEnd type="none" w="med" len="med"/>
-                      <a:tailEnd type="none" w="med" len="med"/>
-                    </a:lnL>
-                    <a:lnR w="9525" cap="flat" cmpd="sng" algn="ctr">
-                      <a:solidFill>
-                        <a:srgbClr val="D9D6EC"/>
-                      </a:solidFill>
-                      <a:prstDash val="solid"/>
-                      <a:round/>
-                      <a:headEnd type="none" w="med" len="med"/>
-                      <a:tailEnd type="none" w="med" len="med"/>
-                    </a:lnR>
-                    <a:lnT w="9525" cap="flat" cmpd="sng" algn="ctr">
-                      <a:solidFill>
-                        <a:srgbClr val="D9D6EC"/>
-                      </a:solidFill>
-                      <a:prstDash val="solid"/>
-                      <a:round/>
-                      <a:headEnd type="none" w="med" len="med"/>
-                      <a:tailEnd type="none" w="med" len="med"/>
-                    </a:lnT>
-                    <a:lnB w="9525" cap="flat" cmpd="sng" algn="ctr">
-                      <a:solidFill>
-                        <a:srgbClr val="D9D6EC"/>
-                      </a:solidFill>
-                      <a:prstDash val="solid"/>
-                      <a:round/>
-                      <a:headEnd type="none" w="med" len="med"/>
-                      <a:tailEnd type="none" w="med" len="med"/>
-                    </a:lnB>
-                    <a:solidFill>
-                      <a:srgbClr val="F7F6FD"/>
-                    </a:solidFill>
-                  </a:tcPr>
-                </a:tc>
-                <a:tc>
-                  <a:txBody>
-                    <a:bodyPr/>
-                    <a:lstStyle/>
-                    <a:p>
-                      <a:pPr indent="0" marL="0">
-                        <a:buNone/>
-                      </a:pPr>
-                      <a:r>
-                        <a:rPr lang="en-US" sz="1300" dirty="0">
-                          <a:solidFill>
-                            <a:srgbClr val="22253A"/>
-                          </a:solidFill>
-                          <a:latin typeface="Courier New" pitchFamily="34" charset="0"/>
-                          <a:ea typeface="Courier New" pitchFamily="34" charset="-122"/>
-                          <a:cs typeface="Courier New" pitchFamily="34" charset="-120"/>
-                        </a:rPr>
-                        <a:t>arn:aws:s3:::corso-artefatti/releases/*</a:t>
-                      </a:r>
-                      <a:endParaRPr lang="en-US" sz="1300" dirty="0">
-                        <a:latin typeface="Courier New" charset="0"/>
-                        <a:ea typeface="Courier New" charset="0"/>
-                        <a:cs typeface="Courier New" charset="0"/>
-                      </a:endParaRPr>
-                    </a:p>
-                  </a:txBody>
-                  <a:tcPr marL="73152" marR="73152" marT="73152" marB="73152" anchor="ctr">
-                    <a:lnL w="9525" cap="flat" cmpd="sng" algn="ctr">
-                      <a:solidFill>
-                        <a:srgbClr val="D9D6EC"/>
-                      </a:solidFill>
-                      <a:prstDash val="solid"/>
-                      <a:round/>
-                      <a:headEnd type="none" w="med" len="med"/>
-                      <a:tailEnd type="none" w="med" len="med"/>
-                    </a:lnL>
-                    <a:lnR w="9525" cap="flat" cmpd="sng" algn="ctr">
-                      <a:solidFill>
-                        <a:srgbClr val="D9D6EC"/>
-                      </a:solidFill>
-                      <a:prstDash val="solid"/>
-                      <a:round/>
-                      <a:headEnd type="none" w="med" len="med"/>
-                      <a:tailEnd type="none" w="med" len="med"/>
-                    </a:lnR>
-                    <a:lnT w="9525" cap="flat" cmpd="sng" algn="ctr">
-                      <a:solidFill>
-                        <a:srgbClr val="D9D6EC"/>
-                      </a:solidFill>
-                      <a:prstDash val="solid"/>
-                      <a:round/>
-                      <a:headEnd type="none" w="med" len="med"/>
-                      <a:tailEnd type="none" w="med" len="med"/>
-                    </a:lnT>
-                    <a:lnB w="9525" cap="flat" cmpd="sng" algn="ctr">
-                      <a:solidFill>
-                        <a:srgbClr val="D9D6EC"/>
-                      </a:solidFill>
-                      <a:prstDash val="solid"/>
-                      <a:round/>
-                      <a:headEnd type="none" w="med" len="med"/>
-                      <a:tailEnd type="none" w="med" len="med"/>
-                    </a:lnB>
-                    <a:solidFill>
-                      <a:srgbClr val="F7F6FD"/>
-                    </a:solidFill>
-                  </a:tcPr>
-                </a:tc>
-              </a:tr>
-            </a:tbl>
-          </a:graphicData>
-        </a:graphic>
-      </p:graphicFrame>
-      <p:sp>
-        <p:nvSpPr>
-          <p:cNvPr id="17" name="Shape 12"/>
+      <p:sp>
+        <p:nvSpPr>
+          <p:cNvPr id="16" name="Shape 12"/>
           <p:cNvSpPr/>
           <p:nvPr/>
         </p:nvSpPr>
         <p:spPr>
           <a:xfrm>
-            <a:off x="5943600" y="4206240"/>
-            <a:ext cx="5696712" cy="1737360"/>
+            <a:off x="5943600" y="1463040"/>
+            <a:ext cx="5696712" cy="1417320"/>
           </a:xfrm>
           <a:prstGeom prst="roundRect">
             <a:avLst>
-              <a:gd name="adj" fmla="val 5263"/>
+              <a:gd name="adj" fmla="val 6452"/>
+            </a:avLst>
+          </a:prstGeom>
+          <a:solidFill>
+            <a:srgbClr val="F7F6FD"/>
+          </a:solidFill>
+          <a:ln w="12700">
+            <a:solidFill>
+              <a:srgbClr val="D9D6EC"/>
+            </a:solidFill>
+            <a:prstDash val="solid"/>
+          </a:ln>
+        </p:spPr>
+      </p:sp>
+      <p:sp>
+        <p:nvSpPr>
+          <p:cNvPr id="17" name="Text 13"/>
+          <p:cNvSpPr txBox="1"/>
+          <p:nvPr/>
+        </p:nvSpPr>
+        <p:spPr>
+          <a:xfrm>
+            <a:off x="6172200" y="1463040"/>
+            <a:ext cx="5303520" cy="1417320"/>
+          </a:xfrm>
+          <a:prstGeom prst="rect">
+            <a:avLst/>
+          </a:prstGeom>
+          <a:noFill/>
+          <a:ln/>
+        </p:spPr>
+        <p:txBody>
+          <a:bodyPr wrap="square" lIns="0" tIns="0" rIns="0" bIns="0" rtlCol="0" anchor="ctr"/>
+          <a:lstStyle/>
+          <a:p>
+            <a:pPr indent="0" marL="0">
+              <a:buNone/>
+            </a:pPr>
+            <a:r>
+              <a:rPr lang="en-US" sz="1800" b="1" dirty="0">
+                <a:solidFill>
+                  <a:srgbClr val="5B3FD0"/>
+                </a:solidFill>
+                <a:latin typeface="Courier New" pitchFamily="34" charset="0"/>
+                <a:ea typeface="Courier New" pitchFamily="34" charset="-122"/>
+                <a:cs typeface="Courier New" pitchFamily="34" charset="-120"/>
+              </a:rPr>
+              <a:t>s3:ListBucket</a:t>
+            </a:r>
+            <a:endParaRPr lang="en-US" sz="1800" dirty="0"/>
+          </a:p>
+          <a:p>
+            <a:pPr indent="0" marL="0">
+              <a:buNone/>
+            </a:pPr>
+            <a:r>
+              <a:rPr lang="en-US" sz="1600" dirty="0">
+                <a:solidFill>
+                  <a:srgbClr val="22253A"/>
+                </a:solidFill>
+                <a:latin typeface="Calibri" pitchFamily="34" charset="0"/>
+                <a:ea typeface="Calibri" pitchFamily="34" charset="-122"/>
+                <a:cs typeface="Calibri" pitchFamily="34" charset="-120"/>
+              </a:rPr>
+              <a:t>elencare → si applica al BUCKET</a:t>
+            </a:r>
+            <a:endParaRPr lang="en-US" sz="1800" dirty="0"/>
+          </a:p>
+          <a:p>
+            <a:pPr indent="0" marL="0">
+              <a:buNone/>
+            </a:pPr>
+            <a:r>
+              <a:rPr lang="en-US" sz="1500" dirty="0">
+                <a:solidFill>
+                  <a:srgbClr val="5F6478"/>
+                </a:solidFill>
+                <a:latin typeface="Courier New" pitchFamily="34" charset="0"/>
+                <a:ea typeface="Courier New" pitchFamily="34" charset="-122"/>
+                <a:cs typeface="Courier New" pitchFamily="34" charset="-120"/>
+              </a:rPr>
+              <a:t>arn:aws:s3:::corso-artefatti</a:t>
+            </a:r>
+            <a:endParaRPr lang="en-US" sz="1800" dirty="0"/>
+          </a:p>
+        </p:txBody>
+      </p:sp>
+      <p:sp>
+        <p:nvSpPr>
+          <p:cNvPr id="18" name="Shape 14"/>
+          <p:cNvSpPr/>
+          <p:nvPr/>
+        </p:nvSpPr>
+        <p:spPr>
+          <a:xfrm>
+            <a:off x="5943600" y="3063240"/>
+            <a:ext cx="5696712" cy="1417320"/>
+          </a:xfrm>
+          <a:prstGeom prst="roundRect">
+            <a:avLst>
+              <a:gd name="adj" fmla="val 6452"/>
+            </a:avLst>
+          </a:prstGeom>
+          <a:solidFill>
+            <a:srgbClr val="F7F6FD"/>
+          </a:solidFill>
+          <a:ln w="12700">
+            <a:solidFill>
+              <a:srgbClr val="D9D6EC"/>
+            </a:solidFill>
+            <a:prstDash val="solid"/>
+          </a:ln>
+        </p:spPr>
+      </p:sp>
+      <p:sp>
+        <p:nvSpPr>
+          <p:cNvPr id="19" name="Text 15"/>
+          <p:cNvSpPr txBox="1"/>
+          <p:nvPr/>
+        </p:nvSpPr>
+        <p:spPr>
+          <a:xfrm>
+            <a:off x="6172200" y="3063240"/>
+            <a:ext cx="5303520" cy="1417320"/>
+          </a:xfrm>
+          <a:prstGeom prst="rect">
+            <a:avLst/>
+          </a:prstGeom>
+          <a:noFill/>
+          <a:ln/>
+        </p:spPr>
+        <p:txBody>
+          <a:bodyPr wrap="square" lIns="0" tIns="0" rIns="0" bIns="0" rtlCol="0" anchor="ctr"/>
+          <a:lstStyle/>
+          <a:p>
+            <a:pPr indent="0" marL="0">
+              <a:buNone/>
+            </a:pPr>
+            <a:r>
+              <a:rPr lang="en-US" sz="1800" b="1" dirty="0">
+                <a:solidFill>
+                  <a:srgbClr val="5B3FD0"/>
+                </a:solidFill>
+                <a:latin typeface="Courier New" pitchFamily="34" charset="0"/>
+                <a:ea typeface="Courier New" pitchFamily="34" charset="-122"/>
+                <a:cs typeface="Courier New" pitchFamily="34" charset="-120"/>
+              </a:rPr>
+              <a:t>s3:GetObject</a:t>
+            </a:r>
+            <a:endParaRPr lang="en-US" sz="1800" dirty="0"/>
+          </a:p>
+          <a:p>
+            <a:pPr indent="0" marL="0">
+              <a:buNone/>
+            </a:pPr>
+            <a:r>
+              <a:rPr lang="en-US" sz="1600" dirty="0">
+                <a:solidFill>
+                  <a:srgbClr val="22253A"/>
+                </a:solidFill>
+                <a:latin typeface="Calibri" pitchFamily="34" charset="0"/>
+                <a:ea typeface="Calibri" pitchFamily="34" charset="-122"/>
+                <a:cs typeface="Calibri" pitchFamily="34" charset="-120"/>
+              </a:rPr>
+              <a:t>scaricare → si applica agli OGGETTI</a:t>
+            </a:r>
+            <a:endParaRPr lang="en-US" sz="1800" dirty="0"/>
+          </a:p>
+          <a:p>
+            <a:pPr indent="0" marL="0">
+              <a:buNone/>
+            </a:pPr>
+            <a:r>
+              <a:rPr lang="en-US" sz="1500" dirty="0">
+                <a:solidFill>
+                  <a:srgbClr val="5F6478"/>
+                </a:solidFill>
+                <a:latin typeface="Courier New" pitchFamily="34" charset="0"/>
+                <a:ea typeface="Courier New" pitchFamily="34" charset="-122"/>
+                <a:cs typeface="Courier New" pitchFamily="34" charset="-120"/>
+              </a:rPr>
+              <a:t>arn:aws:s3:::corso-artefatti/releases/*</a:t>
+            </a:r>
+            <a:endParaRPr lang="en-US" sz="1800" dirty="0"/>
+          </a:p>
+        </p:txBody>
+      </p:sp>
+      <p:sp>
+        <p:nvSpPr>
+          <p:cNvPr id="20" name="Shape 16"/>
+          <p:cNvSpPr/>
+          <p:nvPr/>
+        </p:nvSpPr>
+        <p:spPr>
+          <a:xfrm>
+            <a:off x="5943600" y="4709160"/>
+            <a:ext cx="5696712" cy="1234440"/>
+          </a:xfrm>
+          <a:prstGeom prst="roundRect">
+            <a:avLst>
+              <a:gd name="adj" fmla="val 7407"/>
             </a:avLst>
           </a:prstGeom>
           <a:solidFill>
@@ -16679,14 +15506,14 @@
       </p:sp>
       <p:sp>
         <p:nvSpPr>
-          <p:cNvPr id="18" name="Text 13"/>
+          <p:cNvPr id="21" name="Text 17"/>
           <p:cNvSpPr txBox="1"/>
           <p:nvPr/>
         </p:nvSpPr>
         <p:spPr>
           <a:xfrm>
-            <a:off x="6217920" y="4206240"/>
-            <a:ext cx="5148072" cy="1737360"/>
+            <a:off x="6217920" y="4709160"/>
+            <a:ext cx="5148072" cy="1234440"/>
           </a:xfrm>
           <a:prstGeom prst="rect">
             <a:avLst/>
@@ -16702,7 +15529,7 @@
               <a:buNone/>
             </a:pPr>
             <a:r>
-              <a:rPr lang="en-US" sz="1800" b="1" dirty="0">
+              <a:rPr lang="en-US" sz="1900" b="1" dirty="0">
                 <a:solidFill>
                   <a:srgbClr val="22253A"/>
                 </a:solidFill>
@@ -16710,9 +15537,9 @@
                 <a:ea typeface="Calibri" pitchFamily="34" charset="-122"/>
                 <a:cs typeface="Calibri" pitchFamily="34" charset="-120"/>
               </a:rPr>
-              <a:t>Bucket e oggetti sono risorse diverse: ARN senza / per il bucket, con /* per gli oggetti.</a:t>
-            </a:r>
-            <a:endParaRPr lang="en-US" sz="1800" dirty="0"/>
+              <a:t>ARN senza / per il bucket, con /* per gli oggetti.</a:t>
+            </a:r>
+            <a:endParaRPr lang="en-US" sz="1900" dirty="0"/>
           </a:p>
         </p:txBody>
       </p:sp>

--- a/slide/slide-1-iam.pptx
+++ b/slide/slide-1-iam.pptx
@@ -1576,7 +1576,7 @@
           <a:p>
             <a:r>
               <a:rPr lang="en-US" dirty="0"/>
-              <a:t>Prima di cominciare, sei parole che useremo continuamente. L'account è il vostro spazio in AWS, identificato da un numero di dodici cifre. Un'API è una richiesta fatta ad AWS: ogni clic in console, ogni comando, ogni apply diventa una richiesta. S3 è l'archivio di file di AWS: un bucket è un contenitore, un oggetto è un file. EC2 è un server in AWS, lo vediamo nella lezione 5. Una policy è un documento con delle regole di permesso.</a:t>
+              <a:t>Prima di cominciare, sei parole che useremo continuamente. L'account è il vostro spazio in AWS, identificato da un numero di dodici cifre. Un'API è una richiesta fatta ad AWS: ogni clic in console, ogni comando, ogni apply diventa una richiesta. S3 è l'archivio di file di AWS: un bucket è un contenitore, un oggetto è un file. EC2 è un server in AWS, lo vediamo nella lezione 4. Una policy è un documento con delle regole di permesso.</a:t>
             </a:r>
             <a:endParaRPr lang="en-US" dirty="0"/>
           </a:p>
@@ -13145,7 +13145,7 @@
                 <a:ea typeface="Calibri" pitchFamily="34" charset="-122"/>
                 <a:cs typeface="Calibri" pitchFamily="34" charset="-120"/>
               </a:rPr>
-              <a:t>un server in AWS (lezione 5)</a:t>
+              <a:t>un server in AWS (lezione 4)</a:t>
             </a:r>
             <a:endParaRPr lang="en-US" sz="1600" dirty="0"/>
           </a:p>

--- a/slide/slide-1-iam.pptx
+++ b/slide/slide-1-iam.pptx
@@ -1664,7 +1664,7 @@
           <a:p>
             <a:r>
               <a:rPr lang="en-US" dirty="0"/>
-              <a:t>Ogni volta che qualcuno chiede qualcosa ad AWS, IAM si fa sempre la stessa domanda, in quattro parti: chi lo chiede, cosa vuole fare, su quale cosa, e a quali condizioni. Nel nostro esempio: l'applicazione vuole leggere il file app-v1.0.txt, solo dalla nostra rete. IAM guarda le regole e risponde sì o no. Nelle policy le quattro parti hanno nomi inglesi: principal, action, resource, condition.</a:t>
+              <a:t>Ogni volta che qualcuno chiede qualcosa ad AWS, IAM si fa sempre la stessa domanda, in quattro parti: chi lo chiede, cosa vuole fare, su quale cosa, e a quali condizioni. Nel nostro esempio: l'applicazione vuole leggere il file app-v1.0.txt, solo se ha fatto login con MFA. IAM guarda le regole e risponde sì o no. Nelle policy le quattro parti hanno nomi inglesi: principal, action, resource, condition.</a:t>
             </a:r>
             <a:endParaRPr lang="en-US" dirty="0"/>
           </a:p>
@@ -14193,7 +14193,7 @@
                 <a:ea typeface="Calibri" pitchFamily="34" charset="-122"/>
                 <a:cs typeface="Calibri" pitchFamily="34" charset="-120"/>
               </a:rPr>
-              <a:t>solo dalla nostra rete</a:t>
+              <a:t>solo con login MFA</a:t>
             </a:r>
             <a:endParaRPr lang="en-US" sz="1700" dirty="0"/>
           </a:p>
